--- a/docs/Hot-Desk-Monitor.pptx
+++ b/docs/Hot-Desk-Monitor.pptx
@@ -107,7 +107,7 @@
   <p:extLst>
     <p:ext uri="{521415D9-36F7-43E2-AB2F-B90AF26B5E84}">
       <p14:sectionLst xmlns:p14="http://schemas.microsoft.com/office/powerpoint/2010/main">
-        <p14:section name="Overview" id="{4f65431f-c8b2-76d4-a3bf-239a3a1e76f7}">
+        <p14:section name="Overview" id="{cc1d1ca6-3d57-cb3e-40e3-e8c82a031ea6}">
           <p14:sldIdLst>
             <p14:sldId id="256"/>
           </p14:sldIdLst>
@@ -516,11 +516,12 @@
           <a:p>
             <a:r>
               <a:rPr lang="en-US" dirty="0"/>
-              <a:t>Hot Desk Monitor shows, live, which of the 125 hot desks at DIC Annex are free, and frees desks up automatically.
-Detection: under-desk presence sensors report through TTN or ChirpStack; every desk also has a QR label for check-in, so desks without sensors still work.
-Auto-release: a desk is held for 20 minutes after the person leaves, then becomes available. Check-ins last 3 hours by default and can be renewed by scanning again.
-Employees can reserve a slot ahead, team leads can book several seats, and the floor display helps people find colleagues.
-Admins get a live dashboard coloured by project team (8 teams), utilisation by zone and team, and capacity insights. It deploys to AWS from GitHub and can be demoed in GitHub Codespaces.</a:t>
+              <a:t>Hot desking only works if people can find a free desk quickly and desks are not blocked by people who are not using them. Hot Desk Monitor tackles four pains.
+1. Hunting for a free desk: instead of walking the floors, people see free desks on the live floor plan, on the office wall display, or on their phone.
+2. Ghost desks: desks held by a bag, or booked and never used. Under-desk sensors see when someone leaves; the desk frees itself 20 minutes later. Reservations nobody checks in to are released 30 minutes after the slot starts, and check-ins expire unless renewed.
+3. Teams scattered: occupied desks are coloured by project team, team leads can book several seats together, projects can have pre-allocated seats, and the colleague finder shows who is in and where.
+4. Guesswork on space: the dashboard shows utilisation by zone and project team, and the Insights page gives a capacity outlook (currently on simulated data until real sensor data builds up).
+Key figures: 125 desks on 2 floors at DIC Annex, 8 project teams, 20 minutes to free an empty desk, 3-hour default check-in. It deploys to AWS from GitHub and can be demoed in GitHub Codespaces.</a:t>
             </a:r>
             <a:endParaRPr lang="en-US" dirty="0"/>
           </a:p>
@@ -640,7 +641,7 @@
           <a:lstStyle>
             <a:lvl1pPr indent="0" marL="0">
               <a:buNone/>
-              <a:defRPr lang="en-US" sz="3200" b="1" dirty="0">
+              <a:defRPr lang="en-US" sz="3000" b="1" dirty="0">
                 <a:solidFill>
                   <a:schemeClr val="tx1"/>
                 </a:solidFill>
@@ -652,14 +653,14 @@
               <a:buNone/>
             </a:pPr>
             <a:r>
-              <a:rPr lang="en-US" sz="3200" b="1" dirty="0">
+              <a:rPr lang="en-US" sz="3000" b="1" dirty="0">
                 <a:solidFill>
                   <a:schemeClr val="tx1"/>
                 </a:solidFill>
               </a:rPr>
               <a:t>Title</a:t>
             </a:r>
-            <a:endParaRPr lang="en-US" sz="3200" dirty="0"/>
+            <a:endParaRPr lang="en-US" sz="3000" dirty="0"/>
           </a:p>
         </p:txBody>
       </p:sp>
@@ -1064,14 +1065,14 @@
               <a:buNone/>
             </a:pPr>
             <a:r>
-              <a:rPr lang="en-US" sz="3200" b="1" dirty="0">
+              <a:rPr lang="en-US" sz="3000" b="1" dirty="0">
                 <a:solidFill>
                   <a:schemeClr val="tx1"/>
                 </a:solidFill>
               </a:rPr>
-              <a:t>Hot Desk Monitor: live desk availability</a:t>
-            </a:r>
-            <a:endParaRPr lang="en-US" sz="3200" dirty="0"/>
+              <a:t>Hot Desk Monitor: taking the pain out of hot desking</a:t>
+            </a:r>
+            <a:endParaRPr lang="en-US" sz="3000" dirty="0"/>
           </a:p>
         </p:txBody>
       </p:sp>
@@ -1107,7 +1108,7 @@
                   <a:schemeClr val="tx2"/>
                 </a:solidFill>
               </a:rPr>
-              <a:t>Sensors and QR check-in show which of DIC Annex’s 125 hot desks are free, and free them up automatically when people leave.</a:t>
+              <a:t>Live sensor and check-in data for DIC Annex’s 125 hot desks, so people find a desk fast and desks never sit blocked.</a:t>
             </a:r>
             <a:endParaRPr lang="en-US" sz="1600" dirty="0"/>
           </a:p>
@@ -1115,32 +1116,135 @@
       </p:sp>
       <p:sp>
         <p:nvSpPr>
-          <p:cNvPr id="5" name="Icon circle 1"/>
+          <p:cNvPr id="5" name="Pain heading"/>
+          <p:cNvSpPr txBox="1"/>
+          <p:nvPr/>
+        </p:nvSpPr>
+        <p:spPr>
+          <a:xfrm>
+            <a:off x="621792" y="1755648"/>
+            <a:ext cx="2743200" cy="228600"/>
+          </a:xfrm>
+          <a:prstGeom prst="rect">
+            <a:avLst/>
+          </a:prstGeom>
+          <a:noFill/>
+          <a:ln/>
+        </p:spPr>
+        <p:txBody>
+          <a:bodyPr wrap="square" lIns="0" tIns="0" rIns="0" bIns="0" rtlCol="0" anchor="ctr"/>
+          <a:lstStyle/>
+          <a:p>
+            <a:pPr indent="0" marL="0">
+              <a:buNone/>
+            </a:pPr>
+            <a:r>
+              <a:rPr lang="en-US" sz="1100" b="1" spc="100" kern="0" dirty="0">
+                <a:solidFill>
+                  <a:schemeClr val="tx2"/>
+                </a:solidFill>
+              </a:rPr>
+              <a:t>THE PAIN</a:t>
+            </a:r>
+            <a:endParaRPr lang="en-US" sz="1100" dirty="0"/>
+          </a:p>
+        </p:txBody>
+      </p:sp>
+      <p:sp>
+        <p:nvSpPr>
+          <p:cNvPr id="6" name="Fix heading"/>
+          <p:cNvSpPr txBox="1"/>
+          <p:nvPr/>
+        </p:nvSpPr>
+        <p:spPr>
+          <a:xfrm>
+            <a:off x="4041648" y="1755648"/>
+            <a:ext cx="3108960" cy="228600"/>
+          </a:xfrm>
+          <a:prstGeom prst="rect">
+            <a:avLst/>
+          </a:prstGeom>
+          <a:noFill/>
+          <a:ln/>
+        </p:spPr>
+        <p:txBody>
+          <a:bodyPr wrap="square" lIns="0" tIns="0" rIns="0" bIns="0" rtlCol="0" anchor="ctr"/>
+          <a:lstStyle/>
+          <a:p>
+            <a:pPr indent="0" marL="0">
+              <a:buNone/>
+            </a:pPr>
+            <a:r>
+              <a:rPr lang="en-US" sz="1100" b="1" spc="100" kern="0" dirty="0">
+                <a:solidFill>
+                  <a:schemeClr val="tx2"/>
+                </a:solidFill>
+              </a:rPr>
+              <a:t>WHAT HOT DESK MONITOR DOES</a:t>
+            </a:r>
+            <a:endParaRPr lang="en-US" sz="1100" dirty="0"/>
+          </a:p>
+        </p:txBody>
+      </p:sp>
+      <p:sp>
+        <p:nvSpPr>
+          <p:cNvPr id="7" name="Row 1"/>
           <p:cNvSpPr/>
           <p:nvPr/>
         </p:nvSpPr>
         <p:spPr>
           <a:xfrm>
-            <a:off x="457200" y="1773936"/>
-            <a:ext cx="530352" cy="530352"/>
-          </a:xfrm>
-          <a:prstGeom prst="ellipse">
-            <a:avLst/>
-          </a:prstGeom>
-          <a:solidFill>
-            <a:schemeClr val="accent1"/>
+            <a:off x="457200" y="2057400"/>
+            <a:ext cx="6720840" cy="987552"/>
+          </a:xfrm>
+          <a:prstGeom prst="roundRect">
+            <a:avLst>
+              <a:gd name="adj" fmla="val 9259"/>
+            </a:avLst>
+          </a:prstGeom>
+          <a:solidFill>
+            <a:schemeClr val="bg2"/>
           </a:solidFill>
           <a:ln w="12700">
             <a:solidFill>
-              <a:schemeClr val="accent1"/>
+              <a:schemeClr val="bg2"/>
             </a:solidFill>
             <a:prstDash val="solid"/>
           </a:ln>
         </p:spPr>
       </p:sp>
+      <p:sp>
+        <p:nvSpPr>
+          <p:cNvPr id="8" name="Pain icon circle 1"/>
+          <p:cNvSpPr/>
+          <p:nvPr/>
+        </p:nvSpPr>
+        <p:spPr>
+          <a:xfrm>
+            <a:off x="621792" y="2313432"/>
+            <a:ext cx="475488" cy="475488"/>
+          </a:xfrm>
+          <a:prstGeom prst="ellipse">
+            <a:avLst/>
+          </a:prstGeom>
+          <a:solidFill>
+            <a:schemeClr val="accent6">
+              <a:alpha val="15000"/>
+            </a:schemeClr>
+          </a:solidFill>
+          <a:ln w="12700">
+            <a:solidFill>
+              <a:schemeClr val="accent6">
+                <a:alpha val="15000"/>
+              </a:schemeClr>
+            </a:solidFill>
+            <a:prstDash val="solid"/>
+          </a:ln>
+        </p:spPr>
+      </p:sp>
       <p:pic>
         <p:nvPicPr>
-          <p:cNvPr id="6" name="Icon 1" descr="Detect who is at each desk icon">    </p:cNvPr>
+          <p:cNvPr id="9" name="Pain icon 1" descr="Hunting for a free desk icon">    </p:cNvPr>
           <p:cNvPicPr>
             <a:picLocks noChangeAspect="1"/>
           </p:cNvPicPr>
@@ -1154,8 +1258,8 @@
         </p:blipFill>
         <p:spPr>
           <a:xfrm>
-            <a:off x="566928" y="1883664"/>
-            <a:ext cx="310896" cy="310896"/>
+            <a:off x="722376" y="2414016"/>
+            <a:ext cx="274320" cy="274320"/>
           </a:xfrm>
           <a:prstGeom prst="rect">
             <a:avLst/>
@@ -1164,14 +1268,14 @@
       </p:pic>
       <p:sp>
         <p:nvSpPr>
-          <p:cNvPr id="7" name="Capability 1"/>
+          <p:cNvPr id="10" name="Pain 1"/>
           <p:cNvSpPr txBox="1"/>
           <p:nvPr/>
         </p:nvSpPr>
         <p:spPr>
           <a:xfrm>
-            <a:off x="1188720" y="1737360"/>
-            <a:ext cx="4160520" cy="804672"/>
+            <a:off x="1243584" y="2148840"/>
+            <a:ext cx="2240280" cy="804672"/>
           </a:xfrm>
           <a:prstGeom prst="rect">
             <a:avLst/>
@@ -1180,7 +1284,7 @@
           <a:ln/>
         </p:spPr>
         <p:txBody>
-          <a:bodyPr wrap="square" lIns="0" tIns="0" rIns="0" bIns="0" rtlCol="0" anchor="t"/>
+          <a:bodyPr wrap="square" lIns="0" tIns="0" rIns="0" bIns="0" rtlCol="0" anchor="ctr"/>
           <a:lstStyle/>
           <a:p>
             <a:pPr indent="0" marL="0">
@@ -1190,14 +1294,14 @@
               <a:buNone/>
             </a:pPr>
             <a:r>
-              <a:rPr lang="en-US" sz="1600" b="1" dirty="0">
+              <a:rPr lang="en-US" sz="1500" b="1" dirty="0">
                 <a:solidFill>
                   <a:schemeClr val="tx1"/>
                 </a:solidFill>
               </a:rPr>
-              <a:t>Detect who is at each desk</a:t>
-            </a:r>
-            <a:endParaRPr lang="en-US" sz="1600" dirty="0"/>
+              <a:t>Hunting for a free desk</a:t>
+            </a:r>
+            <a:endParaRPr lang="en-US" sz="1500" dirty="0"/>
           </a:p>
           <a:p>
             <a:pPr indent="0" marL="0">
@@ -1212,24 +1316,24 @@
                   <a:schemeClr val="tx2"/>
                 </a:solidFill>
               </a:rPr>
-              <a:t>Under-desk sensors via TTN or ChirpStack, plus a QR code on every desk to check in</a:t>
-            </a:r>
-            <a:endParaRPr lang="en-US" sz="1600" dirty="0"/>
+              <a:t>Walking the floors to find a seat</a:t>
+            </a:r>
+            <a:endParaRPr lang="en-US" sz="1500" dirty="0"/>
           </a:p>
         </p:txBody>
       </p:sp>
       <p:sp>
         <p:nvSpPr>
-          <p:cNvPr id="8" name="Icon circle 2"/>
+          <p:cNvPr id="11" name="Arrow 1"/>
           <p:cNvSpPr/>
           <p:nvPr/>
         </p:nvSpPr>
         <p:spPr>
           <a:xfrm>
-            <a:off x="457200" y="2670048"/>
-            <a:ext cx="530352" cy="530352"/>
-          </a:xfrm>
-          <a:prstGeom prst="ellipse">
+            <a:off x="3593592" y="2441448"/>
+            <a:ext cx="292608" cy="219456"/>
+          </a:xfrm>
+          <a:prstGeom prst="rightArrow">
             <a:avLst/>
           </a:prstGeom>
           <a:solidFill>
@@ -1243,9 +1347,34 @@
           </a:ln>
         </p:spPr>
       </p:sp>
+      <p:sp>
+        <p:nvSpPr>
+          <p:cNvPr id="12" name="Fix icon circle 1"/>
+          <p:cNvSpPr/>
+          <p:nvPr/>
+        </p:nvSpPr>
+        <p:spPr>
+          <a:xfrm>
+            <a:off x="4041648" y="2313432"/>
+            <a:ext cx="475488" cy="475488"/>
+          </a:xfrm>
+          <a:prstGeom prst="ellipse">
+            <a:avLst/>
+          </a:prstGeom>
+          <a:solidFill>
+            <a:schemeClr val="accent1"/>
+          </a:solidFill>
+          <a:ln w="12700">
+            <a:solidFill>
+              <a:schemeClr val="accent1"/>
+            </a:solidFill>
+            <a:prstDash val="solid"/>
+          </a:ln>
+        </p:spPr>
+      </p:sp>
       <p:pic>
         <p:nvPicPr>
-          <p:cNvPr id="9" name="Icon 2" descr="Free desks automatically icon">    </p:cNvPr>
+          <p:cNvPr id="13" name="Fix icon 1" descr="Live floor plan icon">    </p:cNvPr>
           <p:cNvPicPr>
             <a:picLocks noChangeAspect="1"/>
           </p:cNvPicPr>
@@ -1259,8 +1388,8 @@
         </p:blipFill>
         <p:spPr>
           <a:xfrm>
-            <a:off x="566928" y="2779776"/>
-            <a:ext cx="310896" cy="310896"/>
+            <a:off x="4142232" y="2414016"/>
+            <a:ext cx="274320" cy="274320"/>
           </a:xfrm>
           <a:prstGeom prst="rect">
             <a:avLst/>
@@ -1269,14 +1398,14 @@
       </p:pic>
       <p:sp>
         <p:nvSpPr>
-          <p:cNvPr id="10" name="Capability 2"/>
+          <p:cNvPr id="14" name="Fix 1"/>
           <p:cNvSpPr txBox="1"/>
           <p:nvPr/>
         </p:nvSpPr>
         <p:spPr>
           <a:xfrm>
-            <a:off x="1188720" y="2633472"/>
-            <a:ext cx="4160520" cy="804672"/>
+            <a:off x="4663440" y="2148840"/>
+            <a:ext cx="2395728" cy="804672"/>
           </a:xfrm>
           <a:prstGeom prst="rect">
             <a:avLst/>
@@ -1285,7 +1414,7 @@
           <a:ln/>
         </p:spPr>
         <p:txBody>
-          <a:bodyPr wrap="square" lIns="0" tIns="0" rIns="0" bIns="0" rtlCol="0" anchor="t"/>
+          <a:bodyPr wrap="square" lIns="0" tIns="0" rIns="0" bIns="0" rtlCol="0" anchor="ctr"/>
           <a:lstStyle/>
           <a:p>
             <a:pPr indent="0" marL="0">
@@ -1295,14 +1424,14 @@
               <a:buNone/>
             </a:pPr>
             <a:r>
-              <a:rPr lang="en-US" sz="1600" b="1" dirty="0">
+              <a:rPr lang="en-US" sz="1500" b="1" dirty="0">
                 <a:solidFill>
                   <a:schemeClr val="tx1"/>
                 </a:solidFill>
               </a:rPr>
-              <a:t>Free desks automatically</a:t>
-            </a:r>
-            <a:endParaRPr lang="en-US" sz="1600" dirty="0"/>
+              <a:t>Live floor plan</a:t>
+            </a:r>
+            <a:endParaRPr lang="en-US" sz="1500" dirty="0"/>
           </a:p>
           <a:p>
             <a:pPr indent="0" marL="0">
@@ -1317,40 +1446,71 @@
                   <a:schemeClr val="tx2"/>
                 </a:solidFill>
               </a:rPr>
-              <a:t>Released 20 min after people leave; check-ins last 3 hours unless renewed</a:t>
-            </a:r>
-            <a:endParaRPr lang="en-US" sz="1600" dirty="0"/>
+              <a:t>Free desks on screen, wall display and phone</a:t>
+            </a:r>
+            <a:endParaRPr lang="en-US" sz="1500" dirty="0"/>
           </a:p>
         </p:txBody>
       </p:sp>
       <p:sp>
         <p:nvSpPr>
-          <p:cNvPr id="11" name="Icon circle 3"/>
+          <p:cNvPr id="15" name="Row 2"/>
           <p:cNvSpPr/>
           <p:nvPr/>
         </p:nvSpPr>
         <p:spPr>
           <a:xfrm>
-            <a:off x="457200" y="3566160"/>
-            <a:ext cx="530352" cy="530352"/>
-          </a:xfrm>
-          <a:prstGeom prst="ellipse">
-            <a:avLst/>
-          </a:prstGeom>
-          <a:solidFill>
-            <a:schemeClr val="accent1"/>
+            <a:off x="457200" y="3154680"/>
+            <a:ext cx="6720840" cy="987552"/>
+          </a:xfrm>
+          <a:prstGeom prst="roundRect">
+            <a:avLst>
+              <a:gd name="adj" fmla="val 9259"/>
+            </a:avLst>
+          </a:prstGeom>
+          <a:solidFill>
+            <a:schemeClr val="bg2"/>
           </a:solidFill>
           <a:ln w="12700">
             <a:solidFill>
-              <a:schemeClr val="accent1"/>
+              <a:schemeClr val="bg2"/>
             </a:solidFill>
             <a:prstDash val="solid"/>
           </a:ln>
         </p:spPr>
       </p:sp>
+      <p:sp>
+        <p:nvSpPr>
+          <p:cNvPr id="16" name="Pain icon circle 2"/>
+          <p:cNvSpPr/>
+          <p:nvPr/>
+        </p:nvSpPr>
+        <p:spPr>
+          <a:xfrm>
+            <a:off x="621792" y="3410712"/>
+            <a:ext cx="475488" cy="475488"/>
+          </a:xfrm>
+          <a:prstGeom prst="ellipse">
+            <a:avLst/>
+          </a:prstGeom>
+          <a:solidFill>
+            <a:schemeClr val="accent6">
+              <a:alpha val="15000"/>
+            </a:schemeClr>
+          </a:solidFill>
+          <a:ln w="12700">
+            <a:solidFill>
+              <a:schemeClr val="accent6">
+                <a:alpha val="15000"/>
+              </a:schemeClr>
+            </a:solidFill>
+            <a:prstDash val="solid"/>
+          </a:ln>
+        </p:spPr>
+      </p:sp>
       <p:pic>
         <p:nvPicPr>
-          <p:cNvPr id="12" name="Icon 3" descr="Book and find icon">    </p:cNvPr>
+          <p:cNvPr id="17" name="Pain icon 2" descr="Ghost desks icon">    </p:cNvPr>
           <p:cNvPicPr>
             <a:picLocks noChangeAspect="1"/>
           </p:cNvPicPr>
@@ -1364,8 +1524,8 @@
         </p:blipFill>
         <p:spPr>
           <a:xfrm>
-            <a:off x="566928" y="3675888"/>
-            <a:ext cx="310896" cy="310896"/>
+            <a:off x="722376" y="3511296"/>
+            <a:ext cx="274320" cy="274320"/>
           </a:xfrm>
           <a:prstGeom prst="rect">
             <a:avLst/>
@@ -1374,14 +1534,14 @@
       </p:pic>
       <p:sp>
         <p:nvSpPr>
-          <p:cNvPr id="13" name="Capability 3"/>
+          <p:cNvPr id="18" name="Pain 2"/>
           <p:cNvSpPr txBox="1"/>
           <p:nvPr/>
         </p:nvSpPr>
         <p:spPr>
           <a:xfrm>
-            <a:off x="1188720" y="3529584"/>
-            <a:ext cx="4160520" cy="804672"/>
+            <a:off x="1243584" y="3246120"/>
+            <a:ext cx="2240280" cy="804672"/>
           </a:xfrm>
           <a:prstGeom prst="rect">
             <a:avLst/>
@@ -1390,7 +1550,7 @@
           <a:ln/>
         </p:spPr>
         <p:txBody>
-          <a:bodyPr wrap="square" lIns="0" tIns="0" rIns="0" bIns="0" rtlCol="0" anchor="t"/>
+          <a:bodyPr wrap="square" lIns="0" tIns="0" rIns="0" bIns="0" rtlCol="0" anchor="ctr"/>
           <a:lstStyle/>
           <a:p>
             <a:pPr indent="0" marL="0">
@@ -1400,14 +1560,14 @@
               <a:buNone/>
             </a:pPr>
             <a:r>
-              <a:rPr lang="en-US" sz="1600" b="1" dirty="0">
+              <a:rPr lang="en-US" sz="1500" b="1" dirty="0">
                 <a:solidFill>
                   <a:schemeClr val="tx1"/>
                 </a:solidFill>
               </a:rPr>
-              <a:t>Book and find</a:t>
-            </a:r>
-            <a:endParaRPr lang="en-US" sz="1600" dirty="0"/>
+              <a:t>Ghost desks</a:t>
+            </a:r>
+            <a:endParaRPr lang="en-US" sz="1500" dirty="0"/>
           </a:p>
           <a:p>
             <a:pPr indent="0" marL="0">
@@ -1422,24 +1582,24 @@
                   <a:schemeClr val="tx2"/>
                 </a:solidFill>
               </a:rPr>
-              <a:t>Reserve a slot ahead, book seats for a team, find colleagues on the floor display</a:t>
-            </a:r>
-            <a:endParaRPr lang="en-US" sz="1600" dirty="0"/>
+              <a:t>Held by a bag, or booked and never used</a:t>
+            </a:r>
+            <a:endParaRPr lang="en-US" sz="1500" dirty="0"/>
           </a:p>
         </p:txBody>
       </p:sp>
       <p:sp>
         <p:nvSpPr>
-          <p:cNvPr id="14" name="Icon circle 4"/>
+          <p:cNvPr id="19" name="Arrow 2"/>
           <p:cNvSpPr/>
           <p:nvPr/>
         </p:nvSpPr>
         <p:spPr>
           <a:xfrm>
-            <a:off x="457200" y="4462272"/>
-            <a:ext cx="530352" cy="530352"/>
-          </a:xfrm>
-          <a:prstGeom prst="ellipse">
+            <a:off x="3593592" y="3538728"/>
+            <a:ext cx="292608" cy="219456"/>
+          </a:xfrm>
+          <a:prstGeom prst="rightArrow">
             <a:avLst/>
           </a:prstGeom>
           <a:solidFill>
@@ -1453,9 +1613,34 @@
           </a:ln>
         </p:spPr>
       </p:sp>
+      <p:sp>
+        <p:nvSpPr>
+          <p:cNvPr id="20" name="Fix icon circle 2"/>
+          <p:cNvSpPr/>
+          <p:nvPr/>
+        </p:nvSpPr>
+        <p:spPr>
+          <a:xfrm>
+            <a:off x="4041648" y="3410712"/>
+            <a:ext cx="475488" cy="475488"/>
+          </a:xfrm>
+          <a:prstGeom prst="ellipse">
+            <a:avLst/>
+          </a:prstGeom>
+          <a:solidFill>
+            <a:schemeClr val="accent1"/>
+          </a:solidFill>
+          <a:ln w="12700">
+            <a:solidFill>
+              <a:schemeClr val="accent1"/>
+            </a:solidFill>
+            <a:prstDash val="solid"/>
+          </a:ln>
+        </p:spPr>
+      </p:sp>
       <p:pic>
         <p:nvPicPr>
-          <p:cNvPr id="15" name="Icon 4" descr="Manage and plan icon">    </p:cNvPr>
+          <p:cNvPr id="21" name="Fix icon 2" descr="Automatic release icon">    </p:cNvPr>
           <p:cNvPicPr>
             <a:picLocks noChangeAspect="1"/>
           </p:cNvPicPr>
@@ -1469,8 +1654,8 @@
         </p:blipFill>
         <p:spPr>
           <a:xfrm>
-            <a:off x="566928" y="4572000"/>
-            <a:ext cx="310896" cy="310896"/>
+            <a:off x="4142232" y="3511296"/>
+            <a:ext cx="274320" cy="274320"/>
           </a:xfrm>
           <a:prstGeom prst="rect">
             <a:avLst/>
@@ -1479,14 +1664,14 @@
       </p:pic>
       <p:sp>
         <p:nvSpPr>
-          <p:cNvPr id="16" name="Capability 4"/>
+          <p:cNvPr id="22" name="Fix 2"/>
           <p:cNvSpPr txBox="1"/>
           <p:nvPr/>
         </p:nvSpPr>
         <p:spPr>
           <a:xfrm>
-            <a:off x="1188720" y="4425696"/>
-            <a:ext cx="4160520" cy="804672"/>
+            <a:off x="4663440" y="3246120"/>
+            <a:ext cx="2395728" cy="804672"/>
           </a:xfrm>
           <a:prstGeom prst="rect">
             <a:avLst/>
@@ -1495,7 +1680,7 @@
           <a:ln/>
         </p:spPr>
         <p:txBody>
-          <a:bodyPr wrap="square" lIns="0" tIns="0" rIns="0" bIns="0" rtlCol="0" anchor="t"/>
+          <a:bodyPr wrap="square" lIns="0" tIns="0" rIns="0" bIns="0" rtlCol="0" anchor="ctr"/>
           <a:lstStyle/>
           <a:p>
             <a:pPr indent="0" marL="0">
@@ -1505,14 +1690,14 @@
               <a:buNone/>
             </a:pPr>
             <a:r>
-              <a:rPr lang="en-US" sz="1600" b="1" dirty="0">
+              <a:rPr lang="en-US" sz="1500" b="1" dirty="0">
                 <a:solidFill>
                   <a:schemeClr val="tx1"/>
                 </a:solidFill>
               </a:rPr>
-              <a:t>Manage and plan</a:t>
-            </a:r>
-            <a:endParaRPr lang="en-US" sz="1600" dirty="0"/>
+              <a:t>Automatic release</a:t>
+            </a:r>
+            <a:endParaRPr lang="en-US" sz="1500" dirty="0"/>
           </a:p>
           <a:p>
             <a:pPr indent="0" marL="0">
@@ -1527,26 +1712,558 @@
                   <a:schemeClr val="tx2"/>
                 </a:solidFill>
               </a:rPr>
-              <a:t>Live dashboard by project team, utilisation and capacity insights; runs on AWS</a:t>
-            </a:r>
-            <a:endParaRPr lang="en-US" sz="1600" dirty="0"/>
+              <a:t>Freed 20 min after people leave; no-shows after 30</a:t>
+            </a:r>
+            <a:endParaRPr lang="en-US" sz="1500" dirty="0"/>
           </a:p>
         </p:txBody>
       </p:sp>
       <p:sp>
         <p:nvSpPr>
-          <p:cNvPr id="17" name="Screenshot frame"/>
+          <p:cNvPr id="23" name="Row 3"/>
           <p:cNvSpPr/>
           <p:nvPr/>
         </p:nvSpPr>
         <p:spPr>
           <a:xfrm>
-            <a:off x="5916168" y="1664208"/>
-            <a:ext cx="5870448" cy="3710178"/>
+            <a:off x="457200" y="4251960"/>
+            <a:ext cx="6720840" cy="987552"/>
           </a:xfrm>
           <a:prstGeom prst="roundRect">
             <a:avLst>
-              <a:gd name="adj" fmla="val 1972"/>
+              <a:gd name="adj" fmla="val 9259"/>
+            </a:avLst>
+          </a:prstGeom>
+          <a:solidFill>
+            <a:schemeClr val="bg2"/>
+          </a:solidFill>
+          <a:ln w="12700">
+            <a:solidFill>
+              <a:schemeClr val="bg2"/>
+            </a:solidFill>
+            <a:prstDash val="solid"/>
+          </a:ln>
+        </p:spPr>
+      </p:sp>
+      <p:sp>
+        <p:nvSpPr>
+          <p:cNvPr id="24" name="Pain icon circle 3"/>
+          <p:cNvSpPr/>
+          <p:nvPr/>
+        </p:nvSpPr>
+        <p:spPr>
+          <a:xfrm>
+            <a:off x="621792" y="4507992"/>
+            <a:ext cx="475488" cy="475488"/>
+          </a:xfrm>
+          <a:prstGeom prst="ellipse">
+            <a:avLst/>
+          </a:prstGeom>
+          <a:solidFill>
+            <a:schemeClr val="accent6">
+              <a:alpha val="15000"/>
+            </a:schemeClr>
+          </a:solidFill>
+          <a:ln w="12700">
+            <a:solidFill>
+              <a:schemeClr val="accent6">
+                <a:alpha val="15000"/>
+              </a:schemeClr>
+            </a:solidFill>
+            <a:prstDash val="solid"/>
+          </a:ln>
+        </p:spPr>
+      </p:sp>
+      <p:pic>
+        <p:nvPicPr>
+          <p:cNvPr id="25" name="Pain icon 3" descr="Teams scattered icon">    </p:cNvPr>
+          <p:cNvPicPr>
+            <a:picLocks noChangeAspect="1"/>
+          </p:cNvPicPr>
+          <p:nvPr/>
+        </p:nvPicPr>
+        <p:blipFill>
+          <a:blip r:embed="rId6"/>
+          <a:stretch>
+            <a:fillRect/>
+          </a:stretch>
+        </p:blipFill>
+        <p:spPr>
+          <a:xfrm>
+            <a:off x="722376" y="4608576"/>
+            <a:ext cx="274320" cy="274320"/>
+          </a:xfrm>
+          <a:prstGeom prst="rect">
+            <a:avLst/>
+          </a:prstGeom>
+        </p:spPr>
+      </p:pic>
+      <p:sp>
+        <p:nvSpPr>
+          <p:cNvPr id="26" name="Pain 3"/>
+          <p:cNvSpPr txBox="1"/>
+          <p:nvPr/>
+        </p:nvSpPr>
+        <p:spPr>
+          <a:xfrm>
+            <a:off x="1243584" y="4343400"/>
+            <a:ext cx="2240280" cy="804672"/>
+          </a:xfrm>
+          <a:prstGeom prst="rect">
+            <a:avLst/>
+          </a:prstGeom>
+          <a:noFill/>
+          <a:ln/>
+        </p:spPr>
+        <p:txBody>
+          <a:bodyPr wrap="square" lIns="0" tIns="0" rIns="0" bIns="0" rtlCol="0" anchor="ctr"/>
+          <a:lstStyle/>
+          <a:p>
+            <a:pPr indent="0" marL="0">
+              <a:spcAft>
+                <a:spcPts val="200"/>
+              </a:spcAft>
+              <a:buNone/>
+            </a:pPr>
+            <a:r>
+              <a:rPr lang="en-US" sz="1500" b="1" dirty="0">
+                <a:solidFill>
+                  <a:schemeClr val="tx1"/>
+                </a:solidFill>
+              </a:rPr>
+              <a:t>Teams scattered</a:t>
+            </a:r>
+            <a:endParaRPr lang="en-US" sz="1500" dirty="0"/>
+          </a:p>
+          <a:p>
+            <a:pPr indent="0" marL="0">
+              <a:spcAft>
+                <a:spcPts val="200"/>
+              </a:spcAft>
+              <a:buNone/>
+            </a:pPr>
+            <a:r>
+              <a:rPr lang="en-US" sz="1400" dirty="0">
+                <a:solidFill>
+                  <a:schemeClr val="tx2"/>
+                </a:solidFill>
+              </a:rPr>
+              <a:t>Hard to sit together or find colleagues</a:t>
+            </a:r>
+            <a:endParaRPr lang="en-US" sz="1500" dirty="0"/>
+          </a:p>
+        </p:txBody>
+      </p:sp>
+      <p:sp>
+        <p:nvSpPr>
+          <p:cNvPr id="27" name="Arrow 3"/>
+          <p:cNvSpPr/>
+          <p:nvPr/>
+        </p:nvSpPr>
+        <p:spPr>
+          <a:xfrm>
+            <a:off x="3593592" y="4636008"/>
+            <a:ext cx="292608" cy="219456"/>
+          </a:xfrm>
+          <a:prstGeom prst="rightArrow">
+            <a:avLst/>
+          </a:prstGeom>
+          <a:solidFill>
+            <a:schemeClr val="accent1"/>
+          </a:solidFill>
+          <a:ln w="12700">
+            <a:solidFill>
+              <a:schemeClr val="accent1"/>
+            </a:solidFill>
+            <a:prstDash val="solid"/>
+          </a:ln>
+        </p:spPr>
+      </p:sp>
+      <p:sp>
+        <p:nvSpPr>
+          <p:cNvPr id="28" name="Fix icon circle 3"/>
+          <p:cNvSpPr/>
+          <p:nvPr/>
+        </p:nvSpPr>
+        <p:spPr>
+          <a:xfrm>
+            <a:off x="4041648" y="4507992"/>
+            <a:ext cx="475488" cy="475488"/>
+          </a:xfrm>
+          <a:prstGeom prst="ellipse">
+            <a:avLst/>
+          </a:prstGeom>
+          <a:solidFill>
+            <a:schemeClr val="accent1"/>
+          </a:solidFill>
+          <a:ln w="12700">
+            <a:solidFill>
+              <a:schemeClr val="accent1"/>
+            </a:solidFill>
+            <a:prstDash val="solid"/>
+          </a:ln>
+        </p:spPr>
+      </p:sp>
+      <p:pic>
+        <p:nvPicPr>
+          <p:cNvPr id="29" name="Fix icon 3" descr="Team seating icon">    </p:cNvPr>
+          <p:cNvPicPr>
+            <a:picLocks noChangeAspect="1"/>
+          </p:cNvPicPr>
+          <p:nvPr/>
+        </p:nvPicPr>
+        <p:blipFill>
+          <a:blip r:embed="rId7"/>
+          <a:stretch>
+            <a:fillRect/>
+          </a:stretch>
+        </p:blipFill>
+        <p:spPr>
+          <a:xfrm>
+            <a:off x="4142232" y="4608576"/>
+            <a:ext cx="274320" cy="274320"/>
+          </a:xfrm>
+          <a:prstGeom prst="rect">
+            <a:avLst/>
+          </a:prstGeom>
+        </p:spPr>
+      </p:pic>
+      <p:sp>
+        <p:nvSpPr>
+          <p:cNvPr id="30" name="Fix 3"/>
+          <p:cNvSpPr txBox="1"/>
+          <p:nvPr/>
+        </p:nvSpPr>
+        <p:spPr>
+          <a:xfrm>
+            <a:off x="4663440" y="4343400"/>
+            <a:ext cx="2395728" cy="804672"/>
+          </a:xfrm>
+          <a:prstGeom prst="rect">
+            <a:avLst/>
+          </a:prstGeom>
+          <a:noFill/>
+          <a:ln/>
+        </p:spPr>
+        <p:txBody>
+          <a:bodyPr wrap="square" lIns="0" tIns="0" rIns="0" bIns="0" rtlCol="0" anchor="ctr"/>
+          <a:lstStyle/>
+          <a:p>
+            <a:pPr indent="0" marL="0">
+              <a:spcAft>
+                <a:spcPts val="200"/>
+              </a:spcAft>
+              <a:buNone/>
+            </a:pPr>
+            <a:r>
+              <a:rPr lang="en-US" sz="1500" b="1" dirty="0">
+                <a:solidFill>
+                  <a:schemeClr val="tx1"/>
+                </a:solidFill>
+              </a:rPr>
+              <a:t>Team seating</a:t>
+            </a:r>
+            <a:endParaRPr lang="en-US" sz="1500" dirty="0"/>
+          </a:p>
+          <a:p>
+            <a:pPr indent="0" marL="0">
+              <a:spcAft>
+                <a:spcPts val="200"/>
+              </a:spcAft>
+              <a:buNone/>
+            </a:pPr>
+            <a:r>
+              <a:rPr lang="en-US" sz="1400" dirty="0">
+                <a:solidFill>
+                  <a:schemeClr val="tx2"/>
+                </a:solidFill>
+              </a:rPr>
+              <a:t>Team colours, team bookings, colleague finder</a:t>
+            </a:r>
+            <a:endParaRPr lang="en-US" sz="1500" dirty="0"/>
+          </a:p>
+        </p:txBody>
+      </p:sp>
+      <p:sp>
+        <p:nvSpPr>
+          <p:cNvPr id="31" name="Row 4"/>
+          <p:cNvSpPr/>
+          <p:nvPr/>
+        </p:nvSpPr>
+        <p:spPr>
+          <a:xfrm>
+            <a:off x="457200" y="5349240"/>
+            <a:ext cx="6720840" cy="987552"/>
+          </a:xfrm>
+          <a:prstGeom prst="roundRect">
+            <a:avLst>
+              <a:gd name="adj" fmla="val 9259"/>
+            </a:avLst>
+          </a:prstGeom>
+          <a:solidFill>
+            <a:schemeClr val="bg2"/>
+          </a:solidFill>
+          <a:ln w="12700">
+            <a:solidFill>
+              <a:schemeClr val="bg2"/>
+            </a:solidFill>
+            <a:prstDash val="solid"/>
+          </a:ln>
+        </p:spPr>
+      </p:sp>
+      <p:sp>
+        <p:nvSpPr>
+          <p:cNvPr id="32" name="Pain icon circle 4"/>
+          <p:cNvSpPr/>
+          <p:nvPr/>
+        </p:nvSpPr>
+        <p:spPr>
+          <a:xfrm>
+            <a:off x="621792" y="5605272"/>
+            <a:ext cx="475488" cy="475488"/>
+          </a:xfrm>
+          <a:prstGeom prst="ellipse">
+            <a:avLst/>
+          </a:prstGeom>
+          <a:solidFill>
+            <a:schemeClr val="accent6">
+              <a:alpha val="15000"/>
+            </a:schemeClr>
+          </a:solidFill>
+          <a:ln w="12700">
+            <a:solidFill>
+              <a:schemeClr val="accent6">
+                <a:alpha val="15000"/>
+              </a:schemeClr>
+            </a:solidFill>
+            <a:prstDash val="solid"/>
+          </a:ln>
+        </p:spPr>
+      </p:sp>
+      <p:pic>
+        <p:nvPicPr>
+          <p:cNvPr id="33" name="Pain icon 4" descr="Guesswork on space icon">    </p:cNvPr>
+          <p:cNvPicPr>
+            <a:picLocks noChangeAspect="1"/>
+          </p:cNvPicPr>
+          <p:nvPr/>
+        </p:nvPicPr>
+        <p:blipFill>
+          <a:blip r:embed="rId8"/>
+          <a:stretch>
+            <a:fillRect/>
+          </a:stretch>
+        </p:blipFill>
+        <p:spPr>
+          <a:xfrm>
+            <a:off x="722376" y="5705856"/>
+            <a:ext cx="274320" cy="274320"/>
+          </a:xfrm>
+          <a:prstGeom prst="rect">
+            <a:avLst/>
+          </a:prstGeom>
+        </p:spPr>
+      </p:pic>
+      <p:sp>
+        <p:nvSpPr>
+          <p:cNvPr id="34" name="Pain 4"/>
+          <p:cNvSpPr txBox="1"/>
+          <p:nvPr/>
+        </p:nvSpPr>
+        <p:spPr>
+          <a:xfrm>
+            <a:off x="1243584" y="5440680"/>
+            <a:ext cx="2240280" cy="804672"/>
+          </a:xfrm>
+          <a:prstGeom prst="rect">
+            <a:avLst/>
+          </a:prstGeom>
+          <a:noFill/>
+          <a:ln/>
+        </p:spPr>
+        <p:txBody>
+          <a:bodyPr wrap="square" lIns="0" tIns="0" rIns="0" bIns="0" rtlCol="0" anchor="ctr"/>
+          <a:lstStyle/>
+          <a:p>
+            <a:pPr indent="0" marL="0">
+              <a:spcAft>
+                <a:spcPts val="200"/>
+              </a:spcAft>
+              <a:buNone/>
+            </a:pPr>
+            <a:r>
+              <a:rPr lang="en-US" sz="1500" b="1" dirty="0">
+                <a:solidFill>
+                  <a:schemeClr val="tx1"/>
+                </a:solidFill>
+              </a:rPr>
+              <a:t>Guesswork on space</a:t>
+            </a:r>
+            <a:endParaRPr lang="en-US" sz="1500" dirty="0"/>
+          </a:p>
+          <a:p>
+            <a:pPr indent="0" marL="0">
+              <a:spcAft>
+                <a:spcPts val="200"/>
+              </a:spcAft>
+              <a:buNone/>
+            </a:pPr>
+            <a:r>
+              <a:rPr lang="en-US" sz="1400" dirty="0">
+                <a:solidFill>
+                  <a:schemeClr val="tx2"/>
+                </a:solidFill>
+              </a:rPr>
+              <a:t>No data on how desks are really used</a:t>
+            </a:r>
+            <a:endParaRPr lang="en-US" sz="1500" dirty="0"/>
+          </a:p>
+        </p:txBody>
+      </p:sp>
+      <p:sp>
+        <p:nvSpPr>
+          <p:cNvPr id="35" name="Arrow 4"/>
+          <p:cNvSpPr/>
+          <p:nvPr/>
+        </p:nvSpPr>
+        <p:spPr>
+          <a:xfrm>
+            <a:off x="3593592" y="5733288"/>
+            <a:ext cx="292608" cy="219456"/>
+          </a:xfrm>
+          <a:prstGeom prst="rightArrow">
+            <a:avLst/>
+          </a:prstGeom>
+          <a:solidFill>
+            <a:schemeClr val="accent1"/>
+          </a:solidFill>
+          <a:ln w="12700">
+            <a:solidFill>
+              <a:schemeClr val="accent1"/>
+            </a:solidFill>
+            <a:prstDash val="solid"/>
+          </a:ln>
+        </p:spPr>
+      </p:sp>
+      <p:sp>
+        <p:nvSpPr>
+          <p:cNvPr id="36" name="Fix icon circle 4"/>
+          <p:cNvSpPr/>
+          <p:nvPr/>
+        </p:nvSpPr>
+        <p:spPr>
+          <a:xfrm>
+            <a:off x="4041648" y="5605272"/>
+            <a:ext cx="475488" cy="475488"/>
+          </a:xfrm>
+          <a:prstGeom prst="ellipse">
+            <a:avLst/>
+          </a:prstGeom>
+          <a:solidFill>
+            <a:schemeClr val="accent1"/>
+          </a:solidFill>
+          <a:ln w="12700">
+            <a:solidFill>
+              <a:schemeClr val="accent1"/>
+            </a:solidFill>
+            <a:prstDash val="solid"/>
+          </a:ln>
+        </p:spPr>
+      </p:sp>
+      <p:pic>
+        <p:nvPicPr>
+          <p:cNvPr id="37" name="Fix icon 4" descr="Usage insights icon">    </p:cNvPr>
+          <p:cNvPicPr>
+            <a:picLocks noChangeAspect="1"/>
+          </p:cNvPicPr>
+          <p:nvPr/>
+        </p:nvPicPr>
+        <p:blipFill>
+          <a:blip r:embed="rId9"/>
+          <a:stretch>
+            <a:fillRect/>
+          </a:stretch>
+        </p:blipFill>
+        <p:spPr>
+          <a:xfrm>
+            <a:off x="4142232" y="5705856"/>
+            <a:ext cx="274320" cy="274320"/>
+          </a:xfrm>
+          <a:prstGeom prst="rect">
+            <a:avLst/>
+          </a:prstGeom>
+        </p:spPr>
+      </p:pic>
+      <p:sp>
+        <p:nvSpPr>
+          <p:cNvPr id="38" name="Fix 4"/>
+          <p:cNvSpPr txBox="1"/>
+          <p:nvPr/>
+        </p:nvSpPr>
+        <p:spPr>
+          <a:xfrm>
+            <a:off x="4663440" y="5440680"/>
+            <a:ext cx="2395728" cy="804672"/>
+          </a:xfrm>
+          <a:prstGeom prst="rect">
+            <a:avLst/>
+          </a:prstGeom>
+          <a:noFill/>
+          <a:ln/>
+        </p:spPr>
+        <p:txBody>
+          <a:bodyPr wrap="square" lIns="0" tIns="0" rIns="0" bIns="0" rtlCol="0" anchor="ctr"/>
+          <a:lstStyle/>
+          <a:p>
+            <a:pPr indent="0" marL="0">
+              <a:spcAft>
+                <a:spcPts val="200"/>
+              </a:spcAft>
+              <a:buNone/>
+            </a:pPr>
+            <a:r>
+              <a:rPr lang="en-US" sz="1500" b="1" dirty="0">
+                <a:solidFill>
+                  <a:schemeClr val="tx1"/>
+                </a:solidFill>
+              </a:rPr>
+              <a:t>Usage insights</a:t>
+            </a:r>
+            <a:endParaRPr lang="en-US" sz="1500" dirty="0"/>
+          </a:p>
+          <a:p>
+            <a:pPr indent="0" marL="0">
+              <a:spcAft>
+                <a:spcPts val="200"/>
+              </a:spcAft>
+              <a:buNone/>
+            </a:pPr>
+            <a:r>
+              <a:rPr lang="en-US" sz="1400" dirty="0">
+                <a:solidFill>
+                  <a:schemeClr val="tx2"/>
+                </a:solidFill>
+              </a:rPr>
+              <a:t>Utilisation by zone and team, capacity outlook</a:t>
+            </a:r>
+            <a:endParaRPr lang="en-US" sz="1500" dirty="0"/>
+          </a:p>
+        </p:txBody>
+      </p:sp>
+      <p:sp>
+        <p:nvSpPr>
+          <p:cNvPr id="39" name="Screenshot frame"/>
+          <p:cNvSpPr/>
+          <p:nvPr/>
+        </p:nvSpPr>
+        <p:spPr>
+          <a:xfrm>
+            <a:off x="7452360" y="1783080"/>
+            <a:ext cx="4325112" cy="2737485"/>
+          </a:xfrm>
+          <a:prstGeom prst="roundRect">
+            <a:avLst>
+              <a:gd name="adj" fmla="val 2004"/>
             </a:avLst>
           </a:prstGeom>
           <a:solidFill>
@@ -1569,22 +2286,22 @@
       </p:sp>
       <p:pic>
         <p:nvPicPr>
-          <p:cNvPr id="18" name="Dashboard screenshot" descr="Admin dashboard: live floor plan coloured by project team, KPI cards and the colleague finder">    </p:cNvPr>
+          <p:cNvPr id="40" name="Dashboard screenshot" descr="Admin dashboard: live floor plan coloured by project team, KPI cards and the colleague finder">    </p:cNvPr>
           <p:cNvPicPr>
             <a:picLocks noChangeAspect="1"/>
           </p:cNvPicPr>
           <p:nvPr/>
         </p:nvPicPr>
         <p:blipFill>
-          <a:blip r:embed="rId6"/>
+          <a:blip r:embed="rId10"/>
           <a:stretch>
             <a:fillRect/>
           </a:stretch>
         </p:blipFill>
         <p:spPr>
           <a:xfrm>
-            <a:off x="5971032" y="1719072"/>
-            <a:ext cx="5760720" cy="3600450"/>
+            <a:off x="7498080" y="1828800"/>
+            <a:ext cx="4233672" cy="2646045"/>
           </a:xfrm>
           <a:prstGeom prst="rect">
             <a:avLst/>
@@ -1593,14 +2310,14 @@
       </p:pic>
       <p:sp>
         <p:nvSpPr>
-          <p:cNvPr id="19" name="Screenshot caption"/>
+          <p:cNvPr id="41" name="Screenshot caption"/>
           <p:cNvSpPr txBox="1"/>
           <p:nvPr/>
         </p:nvSpPr>
         <p:spPr>
           <a:xfrm>
-            <a:off x="5971032" y="5429250"/>
-            <a:ext cx="5760720" cy="256032"/>
+            <a:off x="7498080" y="4584573"/>
+            <a:ext cx="4233672" cy="237744"/>
           </a:xfrm>
           <a:prstGeom prst="rect">
             <a:avLst/>
@@ -1621,7 +2338,7 @@
                   <a:schemeClr val="tx2"/>
                 </a:solidFill>
               </a:rPr>
-              <a:t>Admin dashboard (demo data): live floor plan coloured by project team, with the colleague finder</a:t>
+              <a:t>Admin dashboard (demo data), coloured by project team</a:t>
             </a:r>
             <a:endParaRPr lang="en-US" sz="1100" dirty="0"/>
           </a:p>
@@ -1629,18 +2346,18 @@
       </p:sp>
       <p:sp>
         <p:nvSpPr>
-          <p:cNvPr id="20" name="Figure card 1"/>
+          <p:cNvPr id="42" name="Figure card 1"/>
           <p:cNvSpPr/>
           <p:nvPr/>
         </p:nvSpPr>
         <p:spPr>
           <a:xfrm>
-            <a:off x="457200" y="5870448"/>
-            <a:ext cx="2635758" cy="530352"/>
+            <a:off x="7498080" y="4873752"/>
+            <a:ext cx="2025396" cy="658368"/>
           </a:xfrm>
           <a:prstGeom prst="roundRect">
             <a:avLst>
-              <a:gd name="adj" fmla="val 13793"/>
+              <a:gd name="adj" fmla="val 11111"/>
             </a:avLst>
           </a:prstGeom>
           <a:solidFill>
@@ -1656,14 +2373,14 @@
       </p:sp>
       <p:sp>
         <p:nvSpPr>
-          <p:cNvPr id="21" name="Figure 1"/>
+          <p:cNvPr id="43" name="Figure 1"/>
           <p:cNvSpPr txBox="1"/>
           <p:nvPr/>
         </p:nvSpPr>
         <p:spPr>
           <a:xfrm>
-            <a:off x="640080" y="5870448"/>
-            <a:ext cx="2269998" cy="530352"/>
+            <a:off x="7662672" y="4873752"/>
+            <a:ext cx="1751076" cy="658368"/>
           </a:xfrm>
           <a:prstGeom prst="rect">
             <a:avLst/>
@@ -1679,42 +2396,45 @@
               <a:buNone/>
             </a:pPr>
             <a:r>
-              <a:rPr lang="en-US" sz="2400" b="1" dirty="0">
+              <a:rPr lang="en-US" sz="2200" b="1" dirty="0">
                 <a:solidFill>
                   <a:schemeClr val="accent1"/>
                 </a:solidFill>
               </a:rPr>
               <a:t>125</a:t>
             </a:r>
-            <a:pPr indent="0" marL="0">
-              <a:buNone/>
-            </a:pPr>
-            <a:r>
-              <a:rPr lang="en-US" sz="1400" dirty="0">
+            <a:endParaRPr lang="en-US" sz="2200" dirty="0"/>
+          </a:p>
+          <a:p>
+            <a:pPr indent="0" marL="0">
+              <a:buNone/>
+            </a:pPr>
+            <a:r>
+              <a:rPr lang="en-US" sz="1200" dirty="0">
                 <a:solidFill>
                   <a:schemeClr val="tx1"/>
                 </a:solidFill>
               </a:rPr>
-              <a:t>  desks on 2 floors</a:t>
-            </a:r>
-            <a:endParaRPr lang="en-US" sz="2400" dirty="0"/>
+              <a:t>desks on 2 floors</a:t>
+            </a:r>
+            <a:endParaRPr lang="en-US" sz="2200" dirty="0"/>
           </a:p>
         </p:txBody>
       </p:sp>
       <p:sp>
         <p:nvSpPr>
-          <p:cNvPr id="22" name="Figure card 2"/>
+          <p:cNvPr id="44" name="Figure card 2"/>
           <p:cNvSpPr/>
           <p:nvPr/>
         </p:nvSpPr>
         <p:spPr>
           <a:xfrm>
-            <a:off x="3275838" y="5870448"/>
-            <a:ext cx="2635758" cy="530352"/>
+            <a:off x="9706356" y="4873752"/>
+            <a:ext cx="2025396" cy="658368"/>
           </a:xfrm>
           <a:prstGeom prst="roundRect">
             <a:avLst>
-              <a:gd name="adj" fmla="val 13793"/>
+              <a:gd name="adj" fmla="val 11111"/>
             </a:avLst>
           </a:prstGeom>
           <a:solidFill>
@@ -1730,14 +2450,14 @@
       </p:sp>
       <p:sp>
         <p:nvSpPr>
-          <p:cNvPr id="23" name="Figure 2"/>
+          <p:cNvPr id="45" name="Figure 2"/>
           <p:cNvSpPr txBox="1"/>
           <p:nvPr/>
         </p:nvSpPr>
         <p:spPr>
           <a:xfrm>
-            <a:off x="3458718" y="5870448"/>
-            <a:ext cx="2269998" cy="530352"/>
+            <a:off x="9870948" y="4873752"/>
+            <a:ext cx="1751076" cy="658368"/>
           </a:xfrm>
           <a:prstGeom prst="rect">
             <a:avLst/>
@@ -1753,42 +2473,45 @@
               <a:buNone/>
             </a:pPr>
             <a:r>
-              <a:rPr lang="en-US" sz="2400" b="1" dirty="0">
+              <a:rPr lang="en-US" sz="2200" b="1" dirty="0">
                 <a:solidFill>
                   <a:schemeClr val="accent1"/>
                 </a:solidFill>
               </a:rPr>
               <a:t>8</a:t>
             </a:r>
-            <a:pPr indent="0" marL="0">
-              <a:buNone/>
-            </a:pPr>
-            <a:r>
-              <a:rPr lang="en-US" sz="1400" dirty="0">
+            <a:endParaRPr lang="en-US" sz="2200" dirty="0"/>
+          </a:p>
+          <a:p>
+            <a:pPr indent="0" marL="0">
+              <a:buNone/>
+            </a:pPr>
+            <a:r>
+              <a:rPr lang="en-US" sz="1200" dirty="0">
                 <a:solidFill>
                   <a:schemeClr val="tx1"/>
                 </a:solidFill>
               </a:rPr>
-              <a:t>  project teams</a:t>
-            </a:r>
-            <a:endParaRPr lang="en-US" sz="2400" dirty="0"/>
+              <a:t>project teams</a:t>
+            </a:r>
+            <a:endParaRPr lang="en-US" sz="2200" dirty="0"/>
           </a:p>
         </p:txBody>
       </p:sp>
       <p:sp>
         <p:nvSpPr>
-          <p:cNvPr id="24" name="Figure card 3"/>
+          <p:cNvPr id="46" name="Figure card 3"/>
           <p:cNvSpPr/>
           <p:nvPr/>
         </p:nvSpPr>
         <p:spPr>
           <a:xfrm>
-            <a:off x="6094476" y="5870448"/>
-            <a:ext cx="2635758" cy="530352"/>
+            <a:off x="7498080" y="5678424"/>
+            <a:ext cx="2025396" cy="658368"/>
           </a:xfrm>
           <a:prstGeom prst="roundRect">
             <a:avLst>
-              <a:gd name="adj" fmla="val 13793"/>
+              <a:gd name="adj" fmla="val 11111"/>
             </a:avLst>
           </a:prstGeom>
           <a:solidFill>
@@ -1804,14 +2527,14 @@
       </p:sp>
       <p:sp>
         <p:nvSpPr>
-          <p:cNvPr id="25" name="Figure 3"/>
+          <p:cNvPr id="47" name="Figure 3"/>
           <p:cNvSpPr txBox="1"/>
           <p:nvPr/>
         </p:nvSpPr>
         <p:spPr>
           <a:xfrm>
-            <a:off x="6277356" y="5870448"/>
-            <a:ext cx="2269998" cy="530352"/>
+            <a:off x="7662672" y="5678424"/>
+            <a:ext cx="1751076" cy="658368"/>
           </a:xfrm>
           <a:prstGeom prst="rect">
             <a:avLst/>
@@ -1827,42 +2550,45 @@
               <a:buNone/>
             </a:pPr>
             <a:r>
-              <a:rPr lang="en-US" sz="2400" b="1" dirty="0">
+              <a:rPr lang="en-US" sz="2200" b="1" dirty="0">
                 <a:solidFill>
                   <a:schemeClr val="accent1"/>
                 </a:solidFill>
               </a:rPr>
               <a:t>20 min</a:t>
             </a:r>
-            <a:pPr indent="0" marL="0">
-              <a:buNone/>
-            </a:pPr>
-            <a:r>
-              <a:rPr lang="en-US" sz="1400" dirty="0">
+            <a:endParaRPr lang="en-US" sz="2200" dirty="0"/>
+          </a:p>
+          <a:p>
+            <a:pPr indent="0" marL="0">
+              <a:buNone/>
+            </a:pPr>
+            <a:r>
+              <a:rPr lang="en-US" sz="1200" dirty="0">
                 <a:solidFill>
                   <a:schemeClr val="tx1"/>
                 </a:solidFill>
               </a:rPr>
-              <a:t>  auto-release</a:t>
-            </a:r>
-            <a:endParaRPr lang="en-US" sz="2400" dirty="0"/>
+              <a:t>to free an empty desk</a:t>
+            </a:r>
+            <a:endParaRPr lang="en-US" sz="2200" dirty="0"/>
           </a:p>
         </p:txBody>
       </p:sp>
       <p:sp>
         <p:nvSpPr>
-          <p:cNvPr id="26" name="Figure card 4"/>
+          <p:cNvPr id="48" name="Figure card 4"/>
           <p:cNvSpPr/>
           <p:nvPr/>
         </p:nvSpPr>
         <p:spPr>
           <a:xfrm>
-            <a:off x="8913114" y="5870448"/>
-            <a:ext cx="2635758" cy="530352"/>
+            <a:off x="9706356" y="5678424"/>
+            <a:ext cx="2025396" cy="658368"/>
           </a:xfrm>
           <a:prstGeom prst="roundRect">
             <a:avLst>
-              <a:gd name="adj" fmla="val 13793"/>
+              <a:gd name="adj" fmla="val 11111"/>
             </a:avLst>
           </a:prstGeom>
           <a:solidFill>
@@ -1878,14 +2604,14 @@
       </p:sp>
       <p:sp>
         <p:nvSpPr>
-          <p:cNvPr id="27" name="Figure 4"/>
+          <p:cNvPr id="49" name="Figure 4"/>
           <p:cNvSpPr txBox="1"/>
           <p:nvPr/>
         </p:nvSpPr>
         <p:spPr>
           <a:xfrm>
-            <a:off x="9095994" y="5870448"/>
-            <a:ext cx="2269998" cy="530352"/>
+            <a:off x="9870948" y="5678424"/>
+            <a:ext cx="1751076" cy="658368"/>
           </a:xfrm>
           <a:prstGeom prst="rect">
             <a:avLst/>
@@ -1901,25 +2627,28 @@
               <a:buNone/>
             </a:pPr>
             <a:r>
-              <a:rPr lang="en-US" sz="2400" b="1" dirty="0">
+              <a:rPr lang="en-US" sz="2200" b="1" dirty="0">
                 <a:solidFill>
                   <a:schemeClr val="accent1"/>
                 </a:solidFill>
               </a:rPr>
               <a:t>3 h</a:t>
             </a:r>
-            <a:pPr indent="0" marL="0">
-              <a:buNone/>
-            </a:pPr>
-            <a:r>
-              <a:rPr lang="en-US" sz="1400" dirty="0">
+            <a:endParaRPr lang="en-US" sz="2200" dirty="0"/>
+          </a:p>
+          <a:p>
+            <a:pPr indent="0" marL="0">
+              <a:buNone/>
+            </a:pPr>
+            <a:r>
+              <a:rPr lang="en-US" sz="1200" dirty="0">
                 <a:solidFill>
                   <a:schemeClr val="tx1"/>
                 </a:solidFill>
               </a:rPr>
-              <a:t>  default check-in</a:t>
-            </a:r>
-            <a:endParaRPr lang="en-US" sz="2400" dirty="0"/>
+              <a:t>default check-in</a:t>
+            </a:r>
+            <a:endParaRPr lang="en-US" sz="2200" dirty="0"/>
           </a:p>
         </p:txBody>
       </p:sp>
@@ -1963,7 +2692,7 @@
         <a:srgbClr val="7C3AED"/>
       </a:accent5>
       <a:accent6>
-        <a:srgbClr val="DC2626"/>
+        <a:srgbClr val="C2410C"/>
       </a:accent6>
       <a:hlink>
         <a:srgbClr val="2563EB"/>

--- a/docs/Hot-Desk-Monitor.pptx
+++ b/docs/Hot-Desk-Monitor.pptx
@@ -6,9 +6,10 @@
   </p:sldMasterIdLst>
   <p:sldIdLst>
     <p:sldId id="256" r:id="rId2"/>
+    <p:sldId id="257" r:id="rId3"/>
   </p:sldIdLst>
   <p:notesMasterIdLst>
-    <p:notesMasterId r:id="rId3"/>
+    <p:notesMasterId r:id="rId4"/>
   </p:notesMasterIdLst>
   <p:sldSz cx="12192000" cy="6858000"/>
   <p:notesSz cx="6858000" cy="12192000"/>
@@ -107,9 +108,14 @@
   <p:extLst>
     <p:ext uri="{521415D9-36F7-43E2-AB2F-B90AF26B5E84}">
       <p14:sectionLst xmlns:p14="http://schemas.microsoft.com/office/powerpoint/2010/main">
-        <p14:section name="Overview" id="{cc1d1ca6-3d57-cb3e-40e3-e8c82a031ea6}">
+        <p14:section name="Introduction" id="{66c6bf59-04c5-ac98-43a1-7c0b860f20e8}">
           <p14:sldIdLst>
             <p14:sldId id="256"/>
+          </p14:sldIdLst>
+        </p14:section>
+        <p14:section name="Overview" id="{6a14ce3c-00c7-0d1f-d2f6-4c6d14938488}">
+          <p14:sldIdLst>
+            <p14:sldId id="257"/>
           </p14:sldIdLst>
         </p14:section>
       </p14:sectionLst>
@@ -516,12 +522,12 @@
           <a:p>
             <a:r>
               <a:rPr lang="en-US" dirty="0"/>
-              <a:t>Hot desking only works if people can find a free desk quickly and desks are not blocked by people who are not using them. Hot Desk Monitor tackles four pains.
-1. Hunting for a free desk: instead of walking the floors, people see free desks on the live floor plan, on the office wall display, or on their phone.
-2. Ghost desks: desks held by a bag, or booked and never used. Under-desk sensors see when someone leaves; the desk frees itself 20 minutes later. Reservations nobody checks in to are released 30 minutes after the slot starts, and check-ins expire unless renewed.
-3. Teams scattered: occupied desks are coloured by project team, team leads can book several seats together, projects can have pre-allocated seats, and the colleague finder shows who is in and where.
-4. Guesswork on space: the dashboard shows utilisation by zone and project team, and the Insights page gives a capacity outlook (currently on simulated data until real sensor data builds up).
-Key figures: 125 desks on 2 floors at DIC Annex, 8 project teams, 20 minutes to free an empty desk, 3-hour default check-in. It deploys to AWS from GitHub and can be demoed in GitHub Codespaces.</a:t>
+              <a:t>Before the solution, a typical morning at DIC Annex.
+9:05: someone arrives and every desk looks taken, but it is a bag, a jacket or a sticky note; nobody is actually sitting there.
+Crowded: one zone, here the Digital Factory, is packed because teams squeeze in where they always sit; latecomers from the same project have nowhere to go.
+Empty: at the same time another zone, here the AI Lab, is almost empty, a short walk away, but nobody knows.
+Scattered: teammates end up on different floors and spend time on the phone working out where everyone is.
+The cost: time lost every morning, teams kept apart, and space that is crowded in one place and empty in another. Next slide: how Hot Desk Monitor fixes each of these.</a:t>
             </a:r>
             <a:endParaRPr lang="en-US" dirty="0"/>
           </a:p>
@@ -545,6 +551,99 @@
             <a:fld id="{F7021451-1387-4CA6-816F-3879F97B5CBC}" type="slidenum">
               <a:rPr lang="en-US"/>
               <a:t>1</a:t>
+            </a:fld>
+            <a:endParaRPr lang="en-US"/>
+          </a:p>
+        </p:txBody>
+      </p:sp>
+    </p:spTree>
+    <p:extLst>
+      <p:ext uri="{BB962C8B-B14F-4D97-AF65-F5344CB8AC3E}">
+        <p14:creationId xmlns:p14="http://schemas.microsoft.com/office/powerpoint/2010/main" val="1024086991"/>
+      </p:ext>
+    </p:extLst>
+  </p:cSld>
+  <p:clrMapOvr>
+    <a:masterClrMapping/>
+  </p:clrMapOvr>
+</p:notes>
+</file>
+
+<file path=ppt/notesSlides/notesSlide2.xml><?xml version="1.0" encoding="utf-8"?>
+<p:notes xmlns:a="http://schemas.openxmlformats.org/drawingml/2006/main" xmlns:r="http://schemas.openxmlformats.org/officeDocument/2006/relationships" xmlns:p="http://schemas.openxmlformats.org/presentationml/2006/main">
+  <p:cSld>
+    <p:spTree>
+      <p:nvGrpSpPr>
+        <p:cNvPr id="1" name=""/>
+        <p:cNvGrpSpPr/>
+        <p:nvPr/>
+      </p:nvGrpSpPr>
+      <p:grpSpPr>
+        <a:xfrm>
+          <a:off x="0" y="0"/>
+          <a:ext cx="0" cy="0"/>
+          <a:chOff x="0" y="0"/>
+          <a:chExt cx="0" cy="0"/>
+        </a:xfrm>
+      </p:grpSpPr>
+      <p:sp>
+        <p:nvSpPr>
+          <p:cNvPr id="2" name="Slide Image Placeholder 1"/>
+          <p:cNvSpPr>
+            <a:spLocks noGrp="1" noRot="1" noChangeAspect="1"/>
+          </p:cNvSpPr>
+          <p:nvPr>
+            <p:ph type="sldImg"/>
+          </p:nvPr>
+        </p:nvSpPr>
+        <p:spPr/>
+      </p:sp>
+      <p:sp>
+        <p:nvSpPr>
+          <p:cNvPr id="3" name="Notes Placeholder 2"/>
+          <p:cNvSpPr>
+            <a:spLocks noGrp="1"/>
+          </p:cNvSpPr>
+          <p:nvPr>
+            <p:ph type="body" idx="1"/>
+          </p:nvPr>
+        </p:nvSpPr>
+        <p:spPr/>
+        <p:txBody>
+          <a:bodyPr/>
+          <a:lstStyle/>
+          <a:p>
+            <a:r>
+              <a:rPr lang="en-US" dirty="0"/>
+              <a:t>Hot desking only works if people can find a free desk quickly and desks are not blocked by people who are not using them. Hot Desk Monitor tackles four pains.
+1. Hunting for a free desk: instead of walking the floors, people see free desks on the live floor plan, on the office wall display, or on their phone.
+2. Ghost desks: desks held by a bag, or booked and never used. Under-desk sensors see when someone leaves; the desk frees itself 20 minutes later. Reservations nobody checks in to are released 30 minutes after the slot starts, and check-ins expire unless renewed.
+3. Teams scattered: occupied desks are coloured by project team, team leads can book several seats together, projects can have pre-allocated seats, and the colleague finder shows who is in and where.
+4. Guesswork on space: the dashboard shows utilisation by zone and project team, and the Insights page gives a capacity outlook (currently on simulated data until real sensor data builds up).
+Key figures: 125 desks on 2 floors at DIC Annex, 8 project teams, 20 minutes to free an empty desk, 3-hour default check-in. It deploys to AWS from GitHub and can be demoed in GitHub Codespaces.</a:t>
+            </a:r>
+            <a:endParaRPr lang="en-US" dirty="0"/>
+          </a:p>
+        </p:txBody>
+      </p:sp>
+      <p:sp>
+        <p:nvSpPr>
+          <p:cNvPr id="4" name="Slide Number Placeholder 3"/>
+          <p:cNvSpPr>
+            <a:spLocks noGrp="1"/>
+          </p:cNvSpPr>
+          <p:nvPr>
+            <p:ph type="sldNum" sz="quarter" idx="10"/>
+          </p:nvPr>
+        </p:nvSpPr>
+        <p:spPr/>
+        <p:txBody>
+          <a:bodyPr/>
+          <a:lstStyle/>
+          <a:p>
+            <a:fld id="{F7021451-1387-4CA6-816F-3879F97B5CBC}" type="slidenum">
+              <a:rPr lang="en-US"/>
+              <a:t>2</a:t>
             </a:fld>
             <a:endParaRPr lang="en-US"/>
           </a:p>
@@ -1000,6 +1099,449 @@
 <file path=ppt/slides/slide1.xml><?xml version="1.0" encoding="utf-8"?>
 <p:sld xmlns:a="http://schemas.openxmlformats.org/drawingml/2006/main" xmlns:r="http://schemas.openxmlformats.org/officeDocument/2006/relationships" xmlns:p="http://schemas.openxmlformats.org/presentationml/2006/main">
   <p:cSld name="Slide 1">
+    <p:spTree>
+      <p:nvGrpSpPr>
+        <p:cNvPr id="1" name=""/>
+        <p:cNvGrpSpPr/>
+        <p:nvPr/>
+      </p:nvGrpSpPr>
+      <p:grpSpPr>
+        <a:xfrm>
+          <a:off x="0" y="0"/>
+          <a:ext cx="0" cy="0"/>
+          <a:chOff x="0" y="0"/>
+          <a:chExt cx="0" cy="0"/>
+        </a:xfrm>
+      </p:grpSpPr>
+      <p:pic>
+        <p:nvPicPr>
+          <p:cNvPr id="2" name="Logo" descr="Hot Desk logo">    </p:cNvPr>
+          <p:cNvPicPr>
+            <a:picLocks noChangeAspect="1"/>
+          </p:cNvPicPr>
+          <p:nvPr/>
+        </p:nvPicPr>
+        <p:blipFill>
+          <a:blip r:embed="rId1"/>
+          <a:stretch>
+            <a:fillRect/>
+          </a:stretch>
+        </p:blipFill>
+        <p:spPr>
+          <a:xfrm>
+            <a:off x="457200" y="411480"/>
+            <a:ext cx="566928" cy="566928"/>
+          </a:xfrm>
+          <a:prstGeom prst="rect">
+            <a:avLst/>
+          </a:prstGeom>
+        </p:spPr>
+      </p:pic>
+      <p:sp>
+        <p:nvSpPr>
+          <p:cNvPr id="3" name="Text 0"/>
+          <p:cNvSpPr/>
+          <p:nvPr>
+            <p:ph idx="100" type="title" hasCustomPrompt="1"/>
+          </p:nvPr>
+        </p:nvSpPr>
+        <p:spPr>
+          <a:xfrm>
+            <a:off x="1234440" y="384048"/>
+            <a:ext cx="10469880" cy="566928"/>
+          </a:xfrm>
+          <a:prstGeom prst="rect">
+            <a:avLst/>
+          </a:prstGeom>
+          <a:noFill/>
+          <a:ln/>
+        </p:spPr>
+        <p:txBody>
+          <a:bodyPr wrap="square" lIns="0" tIns="0" rIns="0" bIns="0" rtlCol="0" anchor="ctr"/>
+          <a:lstStyle/>
+          <a:p>
+            <a:pPr indent="0" marL="0">
+              <a:buNone/>
+            </a:pPr>
+            <a:r>
+              <a:rPr lang="en-US" sz="3000" b="1" dirty="0">
+                <a:solidFill>
+                  <a:schemeClr val="tx1"/>
+                </a:solidFill>
+              </a:rPr>
+              <a:t>Hot desking today: the daily desk hunt</a:t>
+            </a:r>
+            <a:endParaRPr lang="en-US" sz="3000" dirty="0"/>
+          </a:p>
+        </p:txBody>
+      </p:sp>
+      <p:sp>
+        <p:nvSpPr>
+          <p:cNvPr id="4" name="Text 0"/>
+          <p:cNvSpPr/>
+          <p:nvPr>
+            <p:ph idx="101" type="body" hasCustomPrompt="1"/>
+          </p:nvPr>
+        </p:nvSpPr>
+        <p:spPr>
+          <a:xfrm>
+            <a:off x="1234440" y="987552"/>
+            <a:ext cx="10469880" cy="566928"/>
+          </a:xfrm>
+          <a:prstGeom prst="rect">
+            <a:avLst/>
+          </a:prstGeom>
+          <a:noFill/>
+          <a:ln/>
+        </p:spPr>
+        <p:txBody>
+          <a:bodyPr wrap="square" lIns="0" tIns="0" rIns="0" bIns="0" rtlCol="0" anchor="t"/>
+          <a:lstStyle/>
+          <a:p>
+            <a:pPr indent="0" marL="0">
+              <a:buNone/>
+            </a:pPr>
+            <a:r>
+              <a:rPr lang="en-US" sz="1600" dirty="0">
+                <a:solidFill>
+                  <a:schemeClr val="tx2"/>
+                </a:solidFill>
+              </a:rPr>
+              <a:t>What our project teams run into at DIC Annex when nobody can see which desks are really free.</a:t>
+            </a:r>
+            <a:endParaRPr lang="en-US" sz="1600" dirty="0"/>
+          </a:p>
+        </p:txBody>
+      </p:sp>
+      <p:pic>
+        <p:nvPicPr>
+          <p:cNvPr id="5" name="Cartoon panel 1" descr="Panel 1, 9:05 AM: a worried SAP team member with a laptop walks past desks claimed by a bag, a jacket and a &quot;Mine!&quot; sticky note, thinking &quot;Every desk is taken…?&quot;">    </p:cNvPr>
+          <p:cNvPicPr>
+            <a:picLocks noChangeAspect="1"/>
+          </p:cNvPicPr>
+          <p:nvPr/>
+        </p:nvPicPr>
+        <p:blipFill>
+          <a:blip r:embed="rId2"/>
+          <a:stretch>
+            <a:fillRect/>
+          </a:stretch>
+        </p:blipFill>
+        <p:spPr>
+          <a:xfrm>
+            <a:off x="457200" y="1691640"/>
+            <a:ext cx="2670048" cy="3115056"/>
+          </a:xfrm>
+          <a:prstGeom prst="rect">
+            <a:avLst/>
+          </a:prstGeom>
+        </p:spPr>
+      </p:pic>
+      <p:sp>
+        <p:nvSpPr>
+          <p:cNvPr id="6" name="Panel caption 1"/>
+          <p:cNvSpPr txBox="1"/>
+          <p:nvPr/>
+        </p:nvSpPr>
+        <p:spPr>
+          <a:xfrm>
+            <a:off x="457200" y="4934712"/>
+            <a:ext cx="2670048" cy="685800"/>
+          </a:xfrm>
+          <a:prstGeom prst="rect">
+            <a:avLst/>
+          </a:prstGeom>
+          <a:noFill/>
+          <a:ln/>
+        </p:spPr>
+        <p:txBody>
+          <a:bodyPr wrap="square" lIns="0" tIns="0" rIns="0" bIns="0" rtlCol="0" anchor="t"/>
+          <a:lstStyle/>
+          <a:p>
+            <a:pPr indent="0" marL="0">
+              <a:buNone/>
+            </a:pPr>
+            <a:r>
+              <a:rPr lang="en-US" sz="1400" dirty="0">
+                <a:solidFill>
+                  <a:schemeClr val="tx1"/>
+                </a:solidFill>
+              </a:rPr>
+              <a:t>Desks look taken (a bag here, a jacket there) but nobody is sitting at them.</a:t>
+            </a:r>
+            <a:endParaRPr lang="en-US" sz="1400" dirty="0"/>
+          </a:p>
+        </p:txBody>
+      </p:sp>
+      <p:pic>
+        <p:nvPicPr>
+          <p:cNvPr id="7" name="Cartoon panel 2" descr="Panel 2, Crowded: the Digital Factory is full, two people stand waiting, and an SAP team member throws up their arms: &quot;No seat for SAP!&quot;">    </p:cNvPr>
+          <p:cNvPicPr>
+            <a:picLocks noChangeAspect="1"/>
+          </p:cNvPicPr>
+          <p:nvPr/>
+        </p:nvPicPr>
+        <p:blipFill>
+          <a:blip r:embed="rId3"/>
+          <a:stretch>
+            <a:fillRect/>
+          </a:stretch>
+        </p:blipFill>
+        <p:spPr>
+          <a:xfrm>
+            <a:off x="3325368" y="1691640"/>
+            <a:ext cx="2670048" cy="3115056"/>
+          </a:xfrm>
+          <a:prstGeom prst="rect">
+            <a:avLst/>
+          </a:prstGeom>
+        </p:spPr>
+      </p:pic>
+      <p:sp>
+        <p:nvSpPr>
+          <p:cNvPr id="8" name="Panel caption 2"/>
+          <p:cNvSpPr txBox="1"/>
+          <p:nvPr/>
+        </p:nvSpPr>
+        <p:spPr>
+          <a:xfrm>
+            <a:off x="3325368" y="4934712"/>
+            <a:ext cx="2670048" cy="685800"/>
+          </a:xfrm>
+          <a:prstGeom prst="rect">
+            <a:avLst/>
+          </a:prstGeom>
+          <a:noFill/>
+          <a:ln/>
+        </p:spPr>
+        <p:txBody>
+          <a:bodyPr wrap="square" lIns="0" tIns="0" rIns="0" bIns="0" rtlCol="0" anchor="t"/>
+          <a:lstStyle/>
+          <a:p>
+            <a:pPr indent="0" marL="0">
+              <a:buNone/>
+            </a:pPr>
+            <a:r>
+              <a:rPr lang="en-US" sz="1400" dirty="0">
+                <a:solidFill>
+                  <a:schemeClr val="tx1"/>
+                </a:solidFill>
+              </a:rPr>
+              <a:t>One zone is packed, and teammates who arrive later have nowhere to sit.</a:t>
+            </a:r>
+            <a:endParaRPr lang="en-US" sz="1400" dirty="0"/>
+          </a:p>
+        </p:txBody>
+      </p:sp>
+      <p:pic>
+        <p:nvPicPr>
+          <p:cNvPr id="9" name="Cartoon panel 3" descr="Panel 3, …and empty: the AI Lab has empty desks, a cobweb, a plant and a tumbleweed rolling past, with only &quot;chirp… chirp…&quot;">    </p:cNvPr>
+          <p:cNvPicPr>
+            <a:picLocks noChangeAspect="1"/>
+          </p:cNvPicPr>
+          <p:nvPr/>
+        </p:nvPicPr>
+        <p:blipFill>
+          <a:blip r:embed="rId4"/>
+          <a:stretch>
+            <a:fillRect/>
+          </a:stretch>
+        </p:blipFill>
+        <p:spPr>
+          <a:xfrm>
+            <a:off x="6193536" y="1691640"/>
+            <a:ext cx="2670048" cy="3115056"/>
+          </a:xfrm>
+          <a:prstGeom prst="rect">
+            <a:avLst/>
+          </a:prstGeom>
+        </p:spPr>
+      </p:pic>
+      <p:sp>
+        <p:nvSpPr>
+          <p:cNvPr id="10" name="Panel caption 3"/>
+          <p:cNvSpPr txBox="1"/>
+          <p:nvPr/>
+        </p:nvSpPr>
+        <p:spPr>
+          <a:xfrm>
+            <a:off x="6193536" y="4934712"/>
+            <a:ext cx="2670048" cy="685800"/>
+          </a:xfrm>
+          <a:prstGeom prst="rect">
+            <a:avLst/>
+          </a:prstGeom>
+          <a:noFill/>
+          <a:ln/>
+        </p:spPr>
+        <p:txBody>
+          <a:bodyPr wrap="square" lIns="0" tIns="0" rIns="0" bIns="0" rtlCol="0" anchor="t"/>
+          <a:lstStyle/>
+          <a:p>
+            <a:pPr indent="0" marL="0">
+              <a:buNone/>
+            </a:pPr>
+            <a:r>
+              <a:rPr lang="en-US" sz="1400" dirty="0">
+                <a:solidFill>
+                  <a:schemeClr val="tx1"/>
+                </a:solidFill>
+              </a:rPr>
+              <a:t>Meanwhile another zone sits empty, a short walk away.</a:t>
+            </a:r>
+            <a:endParaRPr lang="en-US" sz="1400" dirty="0"/>
+          </a:p>
+        </p:txBody>
+      </p:sp>
+      <p:pic>
+        <p:nvPicPr>
+          <p:cNvPr id="11" name="Cartoon panel 4" descr="Panel 4, Scattered: two External team members on the phone on different floors: &quot;Where's the team today?&quot; &quot;No idea, I just got here!&quot;">    </p:cNvPr>
+          <p:cNvPicPr>
+            <a:picLocks noChangeAspect="1"/>
+          </p:cNvPicPr>
+          <p:nvPr/>
+        </p:nvPicPr>
+        <p:blipFill>
+          <a:blip r:embed="rId5"/>
+          <a:stretch>
+            <a:fillRect/>
+          </a:stretch>
+        </p:blipFill>
+        <p:spPr>
+          <a:xfrm>
+            <a:off x="9061704" y="1691640"/>
+            <a:ext cx="2670048" cy="3115056"/>
+          </a:xfrm>
+          <a:prstGeom prst="rect">
+            <a:avLst/>
+          </a:prstGeom>
+        </p:spPr>
+      </p:pic>
+      <p:sp>
+        <p:nvSpPr>
+          <p:cNvPr id="12" name="Panel caption 4"/>
+          <p:cNvSpPr txBox="1"/>
+          <p:nvPr/>
+        </p:nvSpPr>
+        <p:spPr>
+          <a:xfrm>
+            <a:off x="9061704" y="4934712"/>
+            <a:ext cx="2670048" cy="685800"/>
+          </a:xfrm>
+          <a:prstGeom prst="rect">
+            <a:avLst/>
+          </a:prstGeom>
+          <a:noFill/>
+          <a:ln/>
+        </p:spPr>
+        <p:txBody>
+          <a:bodyPr wrap="square" lIns="0" tIns="0" rIns="0" bIns="0" rtlCol="0" anchor="t"/>
+          <a:lstStyle/>
+          <a:p>
+            <a:pPr indent="0" marL="0">
+              <a:buNone/>
+            </a:pPr>
+            <a:r>
+              <a:rPr lang="en-US" sz="1400" dirty="0">
+                <a:solidFill>
+                  <a:schemeClr val="tx1"/>
+                </a:solidFill>
+              </a:rPr>
+              <a:t>Teammates end up scattered and can’t find each other.</a:t>
+            </a:r>
+            <a:endParaRPr lang="en-US" sz="1400" dirty="0"/>
+          </a:p>
+        </p:txBody>
+      </p:sp>
+      <p:sp>
+        <p:nvSpPr>
+          <p:cNvPr id="13" name="Takeaway card"/>
+          <p:cNvSpPr/>
+          <p:nvPr/>
+        </p:nvSpPr>
+        <p:spPr>
+          <a:xfrm>
+            <a:off x="457200" y="5760720"/>
+            <a:ext cx="11274552" cy="603504"/>
+          </a:xfrm>
+          <a:prstGeom prst="roundRect">
+            <a:avLst>
+              <a:gd name="adj" fmla="val 15152"/>
+            </a:avLst>
+          </a:prstGeom>
+          <a:solidFill>
+            <a:schemeClr val="accent6">
+              <a:alpha val="12000"/>
+            </a:schemeClr>
+          </a:solidFill>
+          <a:ln w="12700">
+            <a:solidFill>
+              <a:schemeClr val="accent6">
+                <a:alpha val="12000"/>
+              </a:schemeClr>
+            </a:solidFill>
+            <a:prstDash val="solid"/>
+          </a:ln>
+        </p:spPr>
+      </p:sp>
+      <p:sp>
+        <p:nvSpPr>
+          <p:cNvPr id="14" name="Takeaway"/>
+          <p:cNvSpPr txBox="1"/>
+          <p:nvPr/>
+        </p:nvSpPr>
+        <p:spPr>
+          <a:xfrm>
+            <a:off x="685800" y="5760720"/>
+            <a:ext cx="10835640" cy="603504"/>
+          </a:xfrm>
+          <a:prstGeom prst="rect">
+            <a:avLst/>
+          </a:prstGeom>
+          <a:noFill/>
+          <a:ln/>
+        </p:spPr>
+        <p:txBody>
+          <a:bodyPr wrap="square" lIns="0" tIns="0" rIns="0" bIns="0" rtlCol="0" anchor="ctr"/>
+          <a:lstStyle/>
+          <a:p>
+            <a:pPr indent="0" marL="0">
+              <a:buNone/>
+            </a:pPr>
+            <a:r>
+              <a:rPr lang="en-US" sz="1600" b="1" dirty="0">
+                <a:solidFill>
+                  <a:schemeClr val="accent6"/>
+                </a:solidFill>
+              </a:rPr>
+              <a:t>The cost: </a:t>
+            </a:r>
+            <a:pPr indent="0" marL="0">
+              <a:buNone/>
+            </a:pPr>
+            <a:r>
+              <a:rPr lang="en-US" sz="1600" dirty="0">
+                <a:solidFill>
+                  <a:schemeClr val="tx1"/>
+                </a:solidFill>
+              </a:rPr>
+              <a:t>time lost hunting for desks, teams kept apart, and space crowded in one zone while another sits empty.</a:t>
+            </a:r>
+            <a:endParaRPr lang="en-US" sz="1600" dirty="0"/>
+          </a:p>
+        </p:txBody>
+      </p:sp>
+    </p:spTree>
+  </p:cSld>
+  <p:clrMapOvr>
+    <a:masterClrMapping/>
+  </p:clrMapOvr>
+</p:sld>
+</file>
+
+<file path=ppt/slides/slide2.xml><?xml version="1.0" encoding="utf-8"?>
+<p:sld xmlns:a="http://schemas.openxmlformats.org/drawingml/2006/main" xmlns:r="http://schemas.openxmlformats.org/officeDocument/2006/relationships" xmlns:p="http://schemas.openxmlformats.org/presentationml/2006/main">
+  <p:cSld name="Slide 2">
     <p:spTree>
       <p:nvGrpSpPr>
         <p:cNvPr id="1" name=""/>

--- a/docs/Hot-Desk-Monitor.pptx
+++ b/docs/Hot-Desk-Monitor.pptx
@@ -108,12 +108,12 @@
   <p:extLst>
     <p:ext uri="{521415D9-36F7-43E2-AB2F-B90AF26B5E84}">
       <p14:sectionLst xmlns:p14="http://schemas.microsoft.com/office/powerpoint/2010/main">
-        <p14:section name="Introduction" id="{66c6bf59-04c5-ac98-43a1-7c0b860f20e8}">
+        <p14:section name="Introduction" id="{ac0e7d49-511a-662b-d0e2-14fcdb6064ac}">
           <p14:sldIdLst>
             <p14:sldId id="256"/>
           </p14:sldIdLst>
         </p14:section>
-        <p14:section name="Overview" id="{6a14ce3c-00c7-0d1f-d2f6-4c6d14938488}">
+        <p14:section name="Overview" id="{2b53a16f-ac02-20f3-ff92-f61b1ab51aca}">
           <p14:sldIdLst>
             <p14:sldId id="257"/>
           </p14:sldIdLst>
@@ -615,11 +615,12 @@
           <a:p>
             <a:r>
               <a:rPr lang="en-US" dirty="0"/>
-              <a:t>Hot desking only works if people can find a free desk quickly and desks are not blocked by people who are not using them. Hot Desk Monitor tackles four pains.
+              <a:t>Hot desking only works if people can find a free desk quickly and desks are not blocked by people who are not using them. Hot Desk Monitor tackles five pains.
 1. Hunting for a free desk: instead of walking the floors, people see free desks on the live floor plan, on the office wall display, or on their phone.
 2. Ghost desks: desks held by a bag, or booked and never used. Under-desk sensors see when someone leaves; the desk frees itself 20 minutes later. Reservations nobody checks in to are released 30 minutes after the slot starts, and check-ins expire unless renewed.
 3. Teams scattered: occupied desks are coloured by project team, team leads can book several seats together, projects can have pre-allocated seats, and the colleague finder shows who is in and where.
-4. Guesswork on space: the dashboard shows utilisation by zone and project team, and the Insights page gives a capacity outlook (currently on simulated data until real sensor data builds up).
+4. Guesswork on space: the dashboard shows utilisation by zone and project team, and the busiest days.
+5. A new project team asks for seats, and the administrator cannot tell whether the floor can take them. The Insights page has a what-if planner: add the new team's headcount (or change the seats) and it shows how many people would be left without a seat on busy days and how many seats are needed, alongside a capacity outlook. Insights currently run on simulated data until real sensor and check-in data builds up.
 Key figures: 125 desks on 2 floors at DIC Annex, 8 project teams, 20 minutes to free an empty desk, 3-hour default check-in. It deploys to AWS from GitHub and can be demoed in GitHub Codespaces.</a:t>
             </a:r>
             <a:endParaRPr lang="en-US" dirty="0"/>
@@ -1737,11 +1738,11 @@
         <p:spPr>
           <a:xfrm>
             <a:off x="457200" y="2057400"/>
-            <a:ext cx="6720840" cy="987552"/>
+            <a:ext cx="6720840" cy="786384"/>
           </a:xfrm>
           <a:prstGeom prst="roundRect">
             <a:avLst>
-              <a:gd name="adj" fmla="val 9259"/>
+              <a:gd name="adj" fmla="val 11628"/>
             </a:avLst>
           </a:prstGeom>
           <a:solidFill>
@@ -1763,7 +1764,7 @@
         </p:nvSpPr>
         <p:spPr>
           <a:xfrm>
-            <a:off x="621792" y="2313432"/>
+            <a:off x="621792" y="2212848"/>
             <a:ext cx="475488" cy="475488"/>
           </a:xfrm>
           <a:prstGeom prst="ellipse">
@@ -1800,7 +1801,7 @@
         </p:blipFill>
         <p:spPr>
           <a:xfrm>
-            <a:off x="722376" y="2414016"/>
+            <a:off x="722376" y="2313432"/>
             <a:ext cx="274320" cy="274320"/>
           </a:xfrm>
           <a:prstGeom prst="rect">
@@ -1816,8 +1817,8 @@
         </p:nvSpPr>
         <p:spPr>
           <a:xfrm>
-            <a:off x="1243584" y="2148840"/>
-            <a:ext cx="2240280" cy="804672"/>
+            <a:off x="1243584" y="2103120"/>
+            <a:ext cx="2240280" cy="694944"/>
           </a:xfrm>
           <a:prstGeom prst="rect">
             <a:avLst/>
@@ -1831,7 +1832,7 @@
           <a:p>
             <a:pPr indent="0" marL="0">
               <a:spcAft>
-                <a:spcPts val="200"/>
+                <a:spcPts val="100"/>
               </a:spcAft>
               <a:buNone/>
             </a:pPr>
@@ -1848,7 +1849,7 @@
           <a:p>
             <a:pPr indent="0" marL="0">
               <a:spcAft>
-                <a:spcPts val="200"/>
+                <a:spcPts val="100"/>
               </a:spcAft>
               <a:buNone/>
             </a:pPr>
@@ -1872,7 +1873,7 @@
         </p:nvSpPr>
         <p:spPr>
           <a:xfrm>
-            <a:off x="3593592" y="2441448"/>
+            <a:off x="3593592" y="2340864"/>
             <a:ext cx="292608" cy="219456"/>
           </a:xfrm>
           <a:prstGeom prst="rightArrow">
@@ -1897,7 +1898,7 @@
         </p:nvSpPr>
         <p:spPr>
           <a:xfrm>
-            <a:off x="4041648" y="2313432"/>
+            <a:off x="4041648" y="2212848"/>
             <a:ext cx="475488" cy="475488"/>
           </a:xfrm>
           <a:prstGeom prst="ellipse">
@@ -1930,7 +1931,7 @@
         </p:blipFill>
         <p:spPr>
           <a:xfrm>
-            <a:off x="4142232" y="2414016"/>
+            <a:off x="4142232" y="2313432"/>
             <a:ext cx="274320" cy="274320"/>
           </a:xfrm>
           <a:prstGeom prst="rect">
@@ -1946,8 +1947,8 @@
         </p:nvSpPr>
         <p:spPr>
           <a:xfrm>
-            <a:off x="4663440" y="2148840"/>
-            <a:ext cx="2395728" cy="804672"/>
+            <a:off x="4663440" y="2103120"/>
+            <a:ext cx="2395728" cy="694944"/>
           </a:xfrm>
           <a:prstGeom prst="rect">
             <a:avLst/>
@@ -1961,7 +1962,7 @@
           <a:p>
             <a:pPr indent="0" marL="0">
               <a:spcAft>
-                <a:spcPts val="200"/>
+                <a:spcPts val="100"/>
               </a:spcAft>
               <a:buNone/>
             </a:pPr>
@@ -1978,7 +1979,7 @@
           <a:p>
             <a:pPr indent="0" marL="0">
               <a:spcAft>
-                <a:spcPts val="200"/>
+                <a:spcPts val="100"/>
               </a:spcAft>
               <a:buNone/>
             </a:pPr>
@@ -2002,12 +2003,12 @@
         </p:nvSpPr>
         <p:spPr>
           <a:xfrm>
-            <a:off x="457200" y="3154680"/>
-            <a:ext cx="6720840" cy="987552"/>
+            <a:off x="457200" y="2930652"/>
+            <a:ext cx="6720840" cy="786384"/>
           </a:xfrm>
           <a:prstGeom prst="roundRect">
             <a:avLst>
-              <a:gd name="adj" fmla="val 9259"/>
+              <a:gd name="adj" fmla="val 11628"/>
             </a:avLst>
           </a:prstGeom>
           <a:solidFill>
@@ -2029,7 +2030,7 @@
         </p:nvSpPr>
         <p:spPr>
           <a:xfrm>
-            <a:off x="621792" y="3410712"/>
+            <a:off x="621792" y="3086100"/>
             <a:ext cx="475488" cy="475488"/>
           </a:xfrm>
           <a:prstGeom prst="ellipse">
@@ -2066,7 +2067,7 @@
         </p:blipFill>
         <p:spPr>
           <a:xfrm>
-            <a:off x="722376" y="3511296"/>
+            <a:off x="722376" y="3186684"/>
             <a:ext cx="274320" cy="274320"/>
           </a:xfrm>
           <a:prstGeom prst="rect">
@@ -2082,8 +2083,8 @@
         </p:nvSpPr>
         <p:spPr>
           <a:xfrm>
-            <a:off x="1243584" y="3246120"/>
-            <a:ext cx="2240280" cy="804672"/>
+            <a:off x="1243584" y="2976372"/>
+            <a:ext cx="2240280" cy="694944"/>
           </a:xfrm>
           <a:prstGeom prst="rect">
             <a:avLst/>
@@ -2097,7 +2098,7 @@
           <a:p>
             <a:pPr indent="0" marL="0">
               <a:spcAft>
-                <a:spcPts val="200"/>
+                <a:spcPts val="100"/>
               </a:spcAft>
               <a:buNone/>
             </a:pPr>
@@ -2114,7 +2115,7 @@
           <a:p>
             <a:pPr indent="0" marL="0">
               <a:spcAft>
-                <a:spcPts val="200"/>
+                <a:spcPts val="100"/>
               </a:spcAft>
               <a:buNone/>
             </a:pPr>
@@ -2138,7 +2139,7 @@
         </p:nvSpPr>
         <p:spPr>
           <a:xfrm>
-            <a:off x="3593592" y="3538728"/>
+            <a:off x="3593592" y="3214116"/>
             <a:ext cx="292608" cy="219456"/>
           </a:xfrm>
           <a:prstGeom prst="rightArrow">
@@ -2163,7 +2164,7 @@
         </p:nvSpPr>
         <p:spPr>
           <a:xfrm>
-            <a:off x="4041648" y="3410712"/>
+            <a:off x="4041648" y="3086100"/>
             <a:ext cx="475488" cy="475488"/>
           </a:xfrm>
           <a:prstGeom prst="ellipse">
@@ -2196,7 +2197,7 @@
         </p:blipFill>
         <p:spPr>
           <a:xfrm>
-            <a:off x="4142232" y="3511296"/>
+            <a:off x="4142232" y="3186684"/>
             <a:ext cx="274320" cy="274320"/>
           </a:xfrm>
           <a:prstGeom prst="rect">
@@ -2212,8 +2213,8 @@
         </p:nvSpPr>
         <p:spPr>
           <a:xfrm>
-            <a:off x="4663440" y="3246120"/>
-            <a:ext cx="2395728" cy="804672"/>
+            <a:off x="4663440" y="2976372"/>
+            <a:ext cx="2395728" cy="694944"/>
           </a:xfrm>
           <a:prstGeom prst="rect">
             <a:avLst/>
@@ -2227,7 +2228,7 @@
           <a:p>
             <a:pPr indent="0" marL="0">
               <a:spcAft>
-                <a:spcPts val="200"/>
+                <a:spcPts val="100"/>
               </a:spcAft>
               <a:buNone/>
             </a:pPr>
@@ -2244,7 +2245,7 @@
           <a:p>
             <a:pPr indent="0" marL="0">
               <a:spcAft>
-                <a:spcPts val="200"/>
+                <a:spcPts val="100"/>
               </a:spcAft>
               <a:buNone/>
             </a:pPr>
@@ -2268,12 +2269,12 @@
         </p:nvSpPr>
         <p:spPr>
           <a:xfrm>
-            <a:off x="457200" y="4251960"/>
-            <a:ext cx="6720840" cy="987552"/>
+            <a:off x="457200" y="3803904"/>
+            <a:ext cx="6720840" cy="786384"/>
           </a:xfrm>
           <a:prstGeom prst="roundRect">
             <a:avLst>
-              <a:gd name="adj" fmla="val 9259"/>
+              <a:gd name="adj" fmla="val 11628"/>
             </a:avLst>
           </a:prstGeom>
           <a:solidFill>
@@ -2295,7 +2296,7 @@
         </p:nvSpPr>
         <p:spPr>
           <a:xfrm>
-            <a:off x="621792" y="4507992"/>
+            <a:off x="621792" y="3959352"/>
             <a:ext cx="475488" cy="475488"/>
           </a:xfrm>
           <a:prstGeom prst="ellipse">
@@ -2332,7 +2333,7 @@
         </p:blipFill>
         <p:spPr>
           <a:xfrm>
-            <a:off x="722376" y="4608576"/>
+            <a:off x="722376" y="4059936"/>
             <a:ext cx="274320" cy="274320"/>
           </a:xfrm>
           <a:prstGeom prst="rect">
@@ -2348,8 +2349,8 @@
         </p:nvSpPr>
         <p:spPr>
           <a:xfrm>
-            <a:off x="1243584" y="4343400"/>
-            <a:ext cx="2240280" cy="804672"/>
+            <a:off x="1243584" y="3849624"/>
+            <a:ext cx="2240280" cy="694944"/>
           </a:xfrm>
           <a:prstGeom prst="rect">
             <a:avLst/>
@@ -2363,7 +2364,7 @@
           <a:p>
             <a:pPr indent="0" marL="0">
               <a:spcAft>
-                <a:spcPts val="200"/>
+                <a:spcPts val="100"/>
               </a:spcAft>
               <a:buNone/>
             </a:pPr>
@@ -2380,7 +2381,7 @@
           <a:p>
             <a:pPr indent="0" marL="0">
               <a:spcAft>
-                <a:spcPts val="200"/>
+                <a:spcPts val="100"/>
               </a:spcAft>
               <a:buNone/>
             </a:pPr>
@@ -2404,7 +2405,7 @@
         </p:nvSpPr>
         <p:spPr>
           <a:xfrm>
-            <a:off x="3593592" y="4636008"/>
+            <a:off x="3593592" y="4087368"/>
             <a:ext cx="292608" cy="219456"/>
           </a:xfrm>
           <a:prstGeom prst="rightArrow">
@@ -2429,7 +2430,7 @@
         </p:nvSpPr>
         <p:spPr>
           <a:xfrm>
-            <a:off x="4041648" y="4507992"/>
+            <a:off x="4041648" y="3959352"/>
             <a:ext cx="475488" cy="475488"/>
           </a:xfrm>
           <a:prstGeom prst="ellipse">
@@ -2462,7 +2463,7 @@
         </p:blipFill>
         <p:spPr>
           <a:xfrm>
-            <a:off x="4142232" y="4608576"/>
+            <a:off x="4142232" y="4059936"/>
             <a:ext cx="274320" cy="274320"/>
           </a:xfrm>
           <a:prstGeom prst="rect">
@@ -2478,8 +2479,8 @@
         </p:nvSpPr>
         <p:spPr>
           <a:xfrm>
-            <a:off x="4663440" y="4343400"/>
-            <a:ext cx="2395728" cy="804672"/>
+            <a:off x="4663440" y="3849624"/>
+            <a:ext cx="2395728" cy="694944"/>
           </a:xfrm>
           <a:prstGeom prst="rect">
             <a:avLst/>
@@ -2493,7 +2494,7 @@
           <a:p>
             <a:pPr indent="0" marL="0">
               <a:spcAft>
-                <a:spcPts val="200"/>
+                <a:spcPts val="100"/>
               </a:spcAft>
               <a:buNone/>
             </a:pPr>
@@ -2510,7 +2511,7 @@
           <a:p>
             <a:pPr indent="0" marL="0">
               <a:spcAft>
-                <a:spcPts val="200"/>
+                <a:spcPts val="100"/>
               </a:spcAft>
               <a:buNone/>
             </a:pPr>
@@ -2534,12 +2535,12 @@
         </p:nvSpPr>
         <p:spPr>
           <a:xfrm>
-            <a:off x="457200" y="5349240"/>
-            <a:ext cx="6720840" cy="987552"/>
+            <a:off x="457200" y="4677156"/>
+            <a:ext cx="6720840" cy="786384"/>
           </a:xfrm>
           <a:prstGeom prst="roundRect">
             <a:avLst>
-              <a:gd name="adj" fmla="val 9259"/>
+              <a:gd name="adj" fmla="val 11628"/>
             </a:avLst>
           </a:prstGeom>
           <a:solidFill>
@@ -2561,7 +2562,7 @@
         </p:nvSpPr>
         <p:spPr>
           <a:xfrm>
-            <a:off x="621792" y="5605272"/>
+            <a:off x="621792" y="4832604"/>
             <a:ext cx="475488" cy="475488"/>
           </a:xfrm>
           <a:prstGeom prst="ellipse">
@@ -2598,7 +2599,7 @@
         </p:blipFill>
         <p:spPr>
           <a:xfrm>
-            <a:off x="722376" y="5705856"/>
+            <a:off x="722376" y="4933188"/>
             <a:ext cx="274320" cy="274320"/>
           </a:xfrm>
           <a:prstGeom prst="rect">
@@ -2614,8 +2615,8 @@
         </p:nvSpPr>
         <p:spPr>
           <a:xfrm>
-            <a:off x="1243584" y="5440680"/>
-            <a:ext cx="2240280" cy="804672"/>
+            <a:off x="1243584" y="4722876"/>
+            <a:ext cx="2240280" cy="694944"/>
           </a:xfrm>
           <a:prstGeom prst="rect">
             <a:avLst/>
@@ -2629,7 +2630,7 @@
           <a:p>
             <a:pPr indent="0" marL="0">
               <a:spcAft>
-                <a:spcPts val="200"/>
+                <a:spcPts val="100"/>
               </a:spcAft>
               <a:buNone/>
             </a:pPr>
@@ -2646,7 +2647,7 @@
           <a:p>
             <a:pPr indent="0" marL="0">
               <a:spcAft>
-                <a:spcPts val="200"/>
+                <a:spcPts val="100"/>
               </a:spcAft>
               <a:buNone/>
             </a:pPr>
@@ -2670,7 +2671,7 @@
         </p:nvSpPr>
         <p:spPr>
           <a:xfrm>
-            <a:off x="3593592" y="5733288"/>
+            <a:off x="3593592" y="4960620"/>
             <a:ext cx="292608" cy="219456"/>
           </a:xfrm>
           <a:prstGeom prst="rightArrow">
@@ -2695,7 +2696,7 @@
         </p:nvSpPr>
         <p:spPr>
           <a:xfrm>
-            <a:off x="4041648" y="5605272"/>
+            <a:off x="4041648" y="4832604"/>
             <a:ext cx="475488" cy="475488"/>
           </a:xfrm>
           <a:prstGeom prst="ellipse">
@@ -2728,7 +2729,7 @@
         </p:blipFill>
         <p:spPr>
           <a:xfrm>
-            <a:off x="4142232" y="5705856"/>
+            <a:off x="4142232" y="4933188"/>
             <a:ext cx="274320" cy="274320"/>
           </a:xfrm>
           <a:prstGeom prst="rect">
@@ -2744,8 +2745,8 @@
         </p:nvSpPr>
         <p:spPr>
           <a:xfrm>
-            <a:off x="4663440" y="5440680"/>
-            <a:ext cx="2395728" cy="804672"/>
+            <a:off x="4663440" y="4722876"/>
+            <a:ext cx="2395728" cy="694944"/>
           </a:xfrm>
           <a:prstGeom prst="rect">
             <a:avLst/>
@@ -2759,7 +2760,7 @@
           <a:p>
             <a:pPr indent="0" marL="0">
               <a:spcAft>
-                <a:spcPts val="200"/>
+                <a:spcPts val="100"/>
               </a:spcAft>
               <a:buNone/>
             </a:pPr>
@@ -2776,7 +2777,7 @@
           <a:p>
             <a:pPr indent="0" marL="0">
               <a:spcAft>
-                <a:spcPts val="200"/>
+                <a:spcPts val="100"/>
               </a:spcAft>
               <a:buNone/>
             </a:pPr>
@@ -2786,7 +2787,7 @@
                   <a:schemeClr val="tx2"/>
                 </a:solidFill>
               </a:rPr>
-              <a:t>Utilisation by zone and team, capacity outlook</a:t>
+              <a:t>Utilisation by zone and team, busiest days</a:t>
             </a:r>
             <a:endParaRPr lang="en-US" sz="1500" dirty="0"/>
           </a:p>
@@ -2794,7 +2795,273 @@
       </p:sp>
       <p:sp>
         <p:nvSpPr>
-          <p:cNvPr id="39" name="Screenshot frame"/>
+          <p:cNvPr id="39" name="Row 5"/>
+          <p:cNvSpPr/>
+          <p:nvPr/>
+        </p:nvSpPr>
+        <p:spPr>
+          <a:xfrm>
+            <a:off x="457200" y="5550408"/>
+            <a:ext cx="6720840" cy="786384"/>
+          </a:xfrm>
+          <a:prstGeom prst="roundRect">
+            <a:avLst>
+              <a:gd name="adj" fmla="val 11628"/>
+            </a:avLst>
+          </a:prstGeom>
+          <a:solidFill>
+            <a:schemeClr val="bg2"/>
+          </a:solidFill>
+          <a:ln w="12700">
+            <a:solidFill>
+              <a:schemeClr val="bg2"/>
+            </a:solidFill>
+            <a:prstDash val="solid"/>
+          </a:ln>
+        </p:spPr>
+      </p:sp>
+      <p:sp>
+        <p:nvSpPr>
+          <p:cNvPr id="40" name="Pain icon circle 5"/>
+          <p:cNvSpPr/>
+          <p:nvPr/>
+        </p:nvSpPr>
+        <p:spPr>
+          <a:xfrm>
+            <a:off x="621792" y="5705856"/>
+            <a:ext cx="475488" cy="475488"/>
+          </a:xfrm>
+          <a:prstGeom prst="ellipse">
+            <a:avLst/>
+          </a:prstGeom>
+          <a:solidFill>
+            <a:schemeClr val="accent6">
+              <a:alpha val="15000"/>
+            </a:schemeClr>
+          </a:solidFill>
+          <a:ln w="12700">
+            <a:solidFill>
+              <a:schemeClr val="accent6">
+                <a:alpha val="15000"/>
+              </a:schemeClr>
+            </a:solidFill>
+            <a:prstDash val="solid"/>
+          </a:ln>
+        </p:spPr>
+      </p:sp>
+      <p:pic>
+        <p:nvPicPr>
+          <p:cNvPr id="41" name="Pain icon 5" descr="New team asks for seats icon">    </p:cNvPr>
+          <p:cNvPicPr>
+            <a:picLocks noChangeAspect="1"/>
+          </p:cNvPicPr>
+          <p:nvPr/>
+        </p:nvPicPr>
+        <p:blipFill>
+          <a:blip r:embed="rId10"/>
+          <a:stretch>
+            <a:fillRect/>
+          </a:stretch>
+        </p:blipFill>
+        <p:spPr>
+          <a:xfrm>
+            <a:off x="722376" y="5806440"/>
+            <a:ext cx="274320" cy="274320"/>
+          </a:xfrm>
+          <a:prstGeom prst="rect">
+            <a:avLst/>
+          </a:prstGeom>
+        </p:spPr>
+      </p:pic>
+      <p:sp>
+        <p:nvSpPr>
+          <p:cNvPr id="42" name="Pain 5"/>
+          <p:cNvSpPr txBox="1"/>
+          <p:nvPr/>
+        </p:nvSpPr>
+        <p:spPr>
+          <a:xfrm>
+            <a:off x="1243584" y="5596128"/>
+            <a:ext cx="2240280" cy="694944"/>
+          </a:xfrm>
+          <a:prstGeom prst="rect">
+            <a:avLst/>
+          </a:prstGeom>
+          <a:noFill/>
+          <a:ln/>
+        </p:spPr>
+        <p:txBody>
+          <a:bodyPr wrap="square" lIns="0" tIns="0" rIns="0" bIns="0" rtlCol="0" anchor="ctr"/>
+          <a:lstStyle/>
+          <a:p>
+            <a:pPr indent="0" marL="0">
+              <a:spcAft>
+                <a:spcPts val="100"/>
+              </a:spcAft>
+              <a:buNone/>
+            </a:pPr>
+            <a:r>
+              <a:rPr lang="en-US" sz="1500" b="1" dirty="0">
+                <a:solidFill>
+                  <a:schemeClr val="tx1"/>
+                </a:solidFill>
+              </a:rPr>
+              <a:t>New team asks for seats</a:t>
+            </a:r>
+            <a:endParaRPr lang="en-US" sz="1500" dirty="0"/>
+          </a:p>
+          <a:p>
+            <a:pPr indent="0" marL="0">
+              <a:spcAft>
+                <a:spcPts val="100"/>
+              </a:spcAft>
+              <a:buNone/>
+            </a:pPr>
+            <a:r>
+              <a:rPr lang="en-US" sz="1400" dirty="0">
+                <a:solidFill>
+                  <a:schemeClr val="tx2"/>
+                </a:solidFill>
+              </a:rPr>
+              <a:t>Admin can’t tell if the floor can take them</a:t>
+            </a:r>
+            <a:endParaRPr lang="en-US" sz="1500" dirty="0"/>
+          </a:p>
+        </p:txBody>
+      </p:sp>
+      <p:sp>
+        <p:nvSpPr>
+          <p:cNvPr id="43" name="Arrow 5"/>
+          <p:cNvSpPr/>
+          <p:nvPr/>
+        </p:nvSpPr>
+        <p:spPr>
+          <a:xfrm>
+            <a:off x="3593592" y="5833872"/>
+            <a:ext cx="292608" cy="219456"/>
+          </a:xfrm>
+          <a:prstGeom prst="rightArrow">
+            <a:avLst/>
+          </a:prstGeom>
+          <a:solidFill>
+            <a:schemeClr val="accent1"/>
+          </a:solidFill>
+          <a:ln w="12700">
+            <a:solidFill>
+              <a:schemeClr val="accent1"/>
+            </a:solidFill>
+            <a:prstDash val="solid"/>
+          </a:ln>
+        </p:spPr>
+      </p:sp>
+      <p:sp>
+        <p:nvSpPr>
+          <p:cNvPr id="44" name="Fix icon circle 5"/>
+          <p:cNvSpPr/>
+          <p:nvPr/>
+        </p:nvSpPr>
+        <p:spPr>
+          <a:xfrm>
+            <a:off x="4041648" y="5705856"/>
+            <a:ext cx="475488" cy="475488"/>
+          </a:xfrm>
+          <a:prstGeom prst="ellipse">
+            <a:avLst/>
+          </a:prstGeom>
+          <a:solidFill>
+            <a:schemeClr val="accent1"/>
+          </a:solidFill>
+          <a:ln w="12700">
+            <a:solidFill>
+              <a:schemeClr val="accent1"/>
+            </a:solidFill>
+            <a:prstDash val="solid"/>
+          </a:ln>
+        </p:spPr>
+      </p:sp>
+      <p:pic>
+        <p:nvPicPr>
+          <p:cNvPr id="45" name="Fix icon 5" descr="What-if planner icon">    </p:cNvPr>
+          <p:cNvPicPr>
+            <a:picLocks noChangeAspect="1"/>
+          </p:cNvPicPr>
+          <p:nvPr/>
+        </p:nvPicPr>
+        <p:blipFill>
+          <a:blip r:embed="rId11"/>
+          <a:stretch>
+            <a:fillRect/>
+          </a:stretch>
+        </p:blipFill>
+        <p:spPr>
+          <a:xfrm>
+            <a:off x="4142232" y="5806440"/>
+            <a:ext cx="274320" cy="274320"/>
+          </a:xfrm>
+          <a:prstGeom prst="rect">
+            <a:avLst/>
+          </a:prstGeom>
+        </p:spPr>
+      </p:pic>
+      <p:sp>
+        <p:nvSpPr>
+          <p:cNvPr id="46" name="Fix 5"/>
+          <p:cNvSpPr txBox="1"/>
+          <p:nvPr/>
+        </p:nvSpPr>
+        <p:spPr>
+          <a:xfrm>
+            <a:off x="4663440" y="5596128"/>
+            <a:ext cx="2395728" cy="694944"/>
+          </a:xfrm>
+          <a:prstGeom prst="rect">
+            <a:avLst/>
+          </a:prstGeom>
+          <a:noFill/>
+          <a:ln/>
+        </p:spPr>
+        <p:txBody>
+          <a:bodyPr wrap="square" lIns="0" tIns="0" rIns="0" bIns="0" rtlCol="0" anchor="ctr"/>
+          <a:lstStyle/>
+          <a:p>
+            <a:pPr indent="0" marL="0">
+              <a:spcAft>
+                <a:spcPts val="100"/>
+              </a:spcAft>
+              <a:buNone/>
+            </a:pPr>
+            <a:r>
+              <a:rPr lang="en-US" sz="1500" b="1" dirty="0">
+                <a:solidFill>
+                  <a:schemeClr val="tx1"/>
+                </a:solidFill>
+              </a:rPr>
+              <a:t>What-if planner</a:t>
+            </a:r>
+            <a:endParaRPr lang="en-US" sz="1500" dirty="0"/>
+          </a:p>
+          <a:p>
+            <a:pPr indent="0" marL="0">
+              <a:spcAft>
+                <a:spcPts val="100"/>
+              </a:spcAft>
+              <a:buNone/>
+            </a:pPr>
+            <a:r>
+              <a:rPr lang="en-US" sz="1400" dirty="0">
+                <a:solidFill>
+                  <a:schemeClr val="tx2"/>
+                </a:solidFill>
+              </a:rPr>
+              <a:t>Add their headcount, see if seats run out</a:t>
+            </a:r>
+            <a:endParaRPr lang="en-US" sz="1500" dirty="0"/>
+          </a:p>
+        </p:txBody>
+      </p:sp>
+      <p:sp>
+        <p:nvSpPr>
+          <p:cNvPr id="47" name="Screenshot frame"/>
           <p:cNvSpPr/>
           <p:nvPr/>
         </p:nvSpPr>
@@ -2828,14 +3095,14 @@
       </p:sp>
       <p:pic>
         <p:nvPicPr>
-          <p:cNvPr id="40" name="Dashboard screenshot" descr="Admin dashboard: live floor plan coloured by project team, KPI cards and the colleague finder">    </p:cNvPr>
+          <p:cNvPr id="48" name="Dashboard screenshot" descr="Admin dashboard: live floor plan coloured by project team, KPI cards and the colleague finder">    </p:cNvPr>
           <p:cNvPicPr>
             <a:picLocks noChangeAspect="1"/>
           </p:cNvPicPr>
           <p:nvPr/>
         </p:nvPicPr>
         <p:blipFill>
-          <a:blip r:embed="rId10"/>
+          <a:blip r:embed="rId12"/>
           <a:stretch>
             <a:fillRect/>
           </a:stretch>
@@ -2852,7 +3119,7 @@
       </p:pic>
       <p:sp>
         <p:nvSpPr>
-          <p:cNvPr id="41" name="Screenshot caption"/>
+          <p:cNvPr id="49" name="Screenshot caption"/>
           <p:cNvSpPr txBox="1"/>
           <p:nvPr/>
         </p:nvSpPr>
@@ -2888,7 +3155,7 @@
       </p:sp>
       <p:sp>
         <p:nvSpPr>
-          <p:cNvPr id="42" name="Figure card 1"/>
+          <p:cNvPr id="50" name="Figure card 1"/>
           <p:cNvSpPr/>
           <p:nvPr/>
         </p:nvSpPr>
@@ -2915,7 +3182,7 @@
       </p:sp>
       <p:sp>
         <p:nvSpPr>
-          <p:cNvPr id="43" name="Figure 1"/>
+          <p:cNvPr id="51" name="Figure 1"/>
           <p:cNvSpPr txBox="1"/>
           <p:nvPr/>
         </p:nvSpPr>
@@ -2965,7 +3232,7 @@
       </p:sp>
       <p:sp>
         <p:nvSpPr>
-          <p:cNvPr id="44" name="Figure card 2"/>
+          <p:cNvPr id="52" name="Figure card 2"/>
           <p:cNvSpPr/>
           <p:nvPr/>
         </p:nvSpPr>
@@ -2992,7 +3259,7 @@
       </p:sp>
       <p:sp>
         <p:nvSpPr>
-          <p:cNvPr id="45" name="Figure 2"/>
+          <p:cNvPr id="53" name="Figure 2"/>
           <p:cNvSpPr txBox="1"/>
           <p:nvPr/>
         </p:nvSpPr>
@@ -3042,7 +3309,7 @@
       </p:sp>
       <p:sp>
         <p:nvSpPr>
-          <p:cNvPr id="46" name="Figure card 3"/>
+          <p:cNvPr id="54" name="Figure card 3"/>
           <p:cNvSpPr/>
           <p:nvPr/>
         </p:nvSpPr>
@@ -3069,7 +3336,7 @@
       </p:sp>
       <p:sp>
         <p:nvSpPr>
-          <p:cNvPr id="47" name="Figure 3"/>
+          <p:cNvPr id="55" name="Figure 3"/>
           <p:cNvSpPr txBox="1"/>
           <p:nvPr/>
         </p:nvSpPr>
@@ -3119,7 +3386,7 @@
       </p:sp>
       <p:sp>
         <p:nvSpPr>
-          <p:cNvPr id="48" name="Figure card 4"/>
+          <p:cNvPr id="56" name="Figure card 4"/>
           <p:cNvSpPr/>
           <p:nvPr/>
         </p:nvSpPr>
@@ -3146,7 +3413,7 @@
       </p:sp>
       <p:sp>
         <p:nvSpPr>
-          <p:cNvPr id="49" name="Figure 4"/>
+          <p:cNvPr id="57" name="Figure 4"/>
           <p:cNvSpPr txBox="1"/>
           <p:nvPr/>
         </p:nvSpPr>

--- a/docs/Hot-Desk-Monitor.pptx
+++ b/docs/Hot-Desk-Monitor.pptx
@@ -7,9 +7,10 @@
   <p:sldIdLst>
     <p:sldId id="256" r:id="rId2"/>
     <p:sldId id="257" r:id="rId3"/>
+    <p:sldId id="258" r:id="rId4"/>
   </p:sldIdLst>
   <p:notesMasterIdLst>
-    <p:notesMasterId r:id="rId4"/>
+    <p:notesMasterId r:id="rId5"/>
   </p:notesMasterIdLst>
   <p:sldSz cx="12192000" cy="6858000"/>
   <p:notesSz cx="6858000" cy="12192000"/>
@@ -108,14 +109,19 @@
   <p:extLst>
     <p:ext uri="{521415D9-36F7-43E2-AB2F-B90AF26B5E84}">
       <p14:sectionLst xmlns:p14="http://schemas.microsoft.com/office/powerpoint/2010/main">
-        <p14:section name="Introduction" id="{ac0e7d49-511a-662b-d0e2-14fcdb6064ac}">
+        <p14:section name="Introduction" id="{de448b3a-ddfe-adda-e6b3-0859ca709e6d}">
           <p14:sldIdLst>
             <p14:sldId id="256"/>
           </p14:sldIdLst>
         </p14:section>
-        <p14:section name="Overview" id="{2b53a16f-ac02-20f3-ff92-f61b1ab51aca}">
+        <p14:section name="Seat requests" id="{9e1c33a8-5d1a-b692-0998-b3491310f116}">
           <p14:sldIdLst>
             <p14:sldId id="257"/>
+          </p14:sldIdLst>
+        </p14:section>
+        <p14:section name="Overview" id="{793e23b9-2133-a41f-247e-c8eb007551e9}">
+          <p14:sldIdLst>
+            <p14:sldId id="258"/>
           </p14:sldIdLst>
         </p14:section>
       </p14:sectionLst>
@@ -527,7 +533,7 @@
 Crowded: one zone, here the Digital Factory, is packed because teams squeeze in where they always sit; latecomers from the same project have nowhere to go.
 Empty: at the same time another zone, here the AI Lab, is almost empty, a short walk away, but nobody knows.
 Scattered: teammates end up on different floors and spend time on the phone working out where everyone is.
-The cost: time lost every morning, teams kept apart, and space that is crowded in one place and empty in another. Next slide: how Hot Desk Monitor fixes each of these.</a:t>
+The cost: time lost every morning, teams kept apart, and space that is crowded in one place and empty in another. Next: the same problem from the office administrator’s side.</a:t>
             </a:r>
             <a:endParaRPr lang="en-US" dirty="0"/>
           </a:p>
@@ -615,6 +621,99 @@
           <a:p>
             <a:r>
               <a:rPr lang="en-US" dirty="0"/>
+              <a:t>The same problem, seen from the office administrator’s desk.
+Monday 9:00: requests come in from teams starting new projects or taking on joiners, e.g. SAP wants 12 seats, DDAP 6 more, ITGC has 8 joiners next week.
+Head count: the only way to check is to walk the floor, and a count can’t tell a bag from a person, or a busy Tuesday from a quiet Friday.
+The spreadsheet: the seat plan was last updated months ago, so it doesn’t say how many desks are really used.
+So the answer is “let me get back to you”: either a team is turned away from space that is actually free, or squeezed onto a floor that is already full.
+Next slide: how Hot Desk Monitor fixes these, including usage insights and the what-if planner for new teams.</a:t>
+            </a:r>
+            <a:endParaRPr lang="en-US" dirty="0"/>
+          </a:p>
+        </p:txBody>
+      </p:sp>
+      <p:sp>
+        <p:nvSpPr>
+          <p:cNvPr id="4" name="Slide Number Placeholder 3"/>
+          <p:cNvSpPr>
+            <a:spLocks noGrp="1"/>
+          </p:cNvSpPr>
+          <p:nvPr>
+            <p:ph type="sldNum" sz="quarter" idx="10"/>
+          </p:nvPr>
+        </p:nvSpPr>
+        <p:spPr/>
+        <p:txBody>
+          <a:bodyPr/>
+          <a:lstStyle/>
+          <a:p>
+            <a:fld id="{F7021451-1387-4CA6-816F-3879F97B5CBC}" type="slidenum">
+              <a:rPr lang="en-US"/>
+              <a:t>2</a:t>
+            </a:fld>
+            <a:endParaRPr lang="en-US"/>
+          </a:p>
+        </p:txBody>
+      </p:sp>
+    </p:spTree>
+    <p:extLst>
+      <p:ext uri="{BB962C8B-B14F-4D97-AF65-F5344CB8AC3E}">
+        <p14:creationId xmlns:p14="http://schemas.microsoft.com/office/powerpoint/2010/main" val="1024086991"/>
+      </p:ext>
+    </p:extLst>
+  </p:cSld>
+  <p:clrMapOvr>
+    <a:masterClrMapping/>
+  </p:clrMapOvr>
+</p:notes>
+</file>
+
+<file path=ppt/notesSlides/notesSlide3.xml><?xml version="1.0" encoding="utf-8"?>
+<p:notes xmlns:a="http://schemas.openxmlformats.org/drawingml/2006/main" xmlns:r="http://schemas.openxmlformats.org/officeDocument/2006/relationships" xmlns:p="http://schemas.openxmlformats.org/presentationml/2006/main">
+  <p:cSld>
+    <p:spTree>
+      <p:nvGrpSpPr>
+        <p:cNvPr id="1" name=""/>
+        <p:cNvGrpSpPr/>
+        <p:nvPr/>
+      </p:nvGrpSpPr>
+      <p:grpSpPr>
+        <a:xfrm>
+          <a:off x="0" y="0"/>
+          <a:ext cx="0" cy="0"/>
+          <a:chOff x="0" y="0"/>
+          <a:chExt cx="0" cy="0"/>
+        </a:xfrm>
+      </p:grpSpPr>
+      <p:sp>
+        <p:nvSpPr>
+          <p:cNvPr id="2" name="Slide Image Placeholder 1"/>
+          <p:cNvSpPr>
+            <a:spLocks noGrp="1" noRot="1" noChangeAspect="1"/>
+          </p:cNvSpPr>
+          <p:nvPr>
+            <p:ph type="sldImg"/>
+          </p:nvPr>
+        </p:nvSpPr>
+        <p:spPr/>
+      </p:sp>
+      <p:sp>
+        <p:nvSpPr>
+          <p:cNvPr id="3" name="Notes Placeholder 2"/>
+          <p:cNvSpPr>
+            <a:spLocks noGrp="1"/>
+          </p:cNvSpPr>
+          <p:nvPr>
+            <p:ph type="body" idx="1"/>
+          </p:nvPr>
+        </p:nvSpPr>
+        <p:spPr/>
+        <p:txBody>
+          <a:bodyPr/>
+          <a:lstStyle/>
+          <a:p>
+            <a:r>
+              <a:rPr lang="en-US" dirty="0"/>
               <a:t>Hot desking only works if people can find a free desk quickly and desks are not blocked by people who are not using them. Hot Desk Monitor tackles five pains.
 1. Hunting for a free desk: instead of walking the floors, people see free desks on the live floor plan, on the office wall display, or on their phone.
 2. Ghost desks: desks held by a bag, or booked and never used. Under-desk sensors see when someone leaves; the desk frees itself 20 minutes later. Reservations nobody checks in to are released 30 minutes after the slot starts, and check-ins expire unless renewed.
@@ -644,7 +743,7 @@
           <a:p>
             <a:fld id="{F7021451-1387-4CA6-816F-3879F97B5CBC}" type="slidenum">
               <a:rPr lang="en-US"/>
-              <a:t>2</a:t>
+              <a:t>3</a:t>
             </a:fld>
             <a:endParaRPr lang="en-US"/>
           </a:p>
@@ -1543,6 +1642,449 @@
 <file path=ppt/slides/slide2.xml><?xml version="1.0" encoding="utf-8"?>
 <p:sld xmlns:a="http://schemas.openxmlformats.org/drawingml/2006/main" xmlns:r="http://schemas.openxmlformats.org/officeDocument/2006/relationships" xmlns:p="http://schemas.openxmlformats.org/presentationml/2006/main">
   <p:cSld name="Slide 2">
+    <p:spTree>
+      <p:nvGrpSpPr>
+        <p:cNvPr id="1" name=""/>
+        <p:cNvGrpSpPr/>
+        <p:nvPr/>
+      </p:nvGrpSpPr>
+      <p:grpSpPr>
+        <a:xfrm>
+          <a:off x="0" y="0"/>
+          <a:ext cx="0" cy="0"/>
+          <a:chOff x="0" y="0"/>
+          <a:chExt cx="0" cy="0"/>
+        </a:xfrm>
+      </p:grpSpPr>
+      <p:pic>
+        <p:nvPicPr>
+          <p:cNvPr id="2" name="Logo" descr="Hot Desk logo">    </p:cNvPr>
+          <p:cNvPicPr>
+            <a:picLocks noChangeAspect="1"/>
+          </p:cNvPicPr>
+          <p:nvPr/>
+        </p:nvPicPr>
+        <p:blipFill>
+          <a:blip r:embed="rId1"/>
+          <a:stretch>
+            <a:fillRect/>
+          </a:stretch>
+        </p:blipFill>
+        <p:spPr>
+          <a:xfrm>
+            <a:off x="457200" y="411480"/>
+            <a:ext cx="566928" cy="566928"/>
+          </a:xfrm>
+          <a:prstGeom prst="rect">
+            <a:avLst/>
+          </a:prstGeom>
+        </p:spPr>
+      </p:pic>
+      <p:sp>
+        <p:nvSpPr>
+          <p:cNvPr id="3" name="Text 0"/>
+          <p:cNvSpPr/>
+          <p:nvPr>
+            <p:ph idx="100" type="title" hasCustomPrompt="1"/>
+          </p:nvPr>
+        </p:nvSpPr>
+        <p:spPr>
+          <a:xfrm>
+            <a:off x="1234440" y="384048"/>
+            <a:ext cx="10469880" cy="566928"/>
+          </a:xfrm>
+          <a:prstGeom prst="rect">
+            <a:avLst/>
+          </a:prstGeom>
+          <a:noFill/>
+          <a:ln/>
+        </p:spPr>
+        <p:txBody>
+          <a:bodyPr wrap="square" lIns="0" tIns="0" rIns="0" bIns="0" rtlCol="0" anchor="ctr"/>
+          <a:lstStyle/>
+          <a:p>
+            <a:pPr indent="0" marL="0">
+              <a:buNone/>
+            </a:pPr>
+            <a:r>
+              <a:rPr lang="en-US" sz="3000" b="1" dirty="0">
+                <a:solidFill>
+                  <a:schemeClr val="tx1"/>
+                </a:solidFill>
+              </a:rPr>
+              <a:t>Seat requests: can we fit another team?</a:t>
+            </a:r>
+            <a:endParaRPr lang="en-US" sz="3000" dirty="0"/>
+          </a:p>
+        </p:txBody>
+      </p:sp>
+      <p:sp>
+        <p:nvSpPr>
+          <p:cNvPr id="4" name="Text 0"/>
+          <p:cNvSpPr/>
+          <p:nvPr>
+            <p:ph idx="101" type="body" hasCustomPrompt="1"/>
+          </p:nvPr>
+        </p:nvSpPr>
+        <p:spPr>
+          <a:xfrm>
+            <a:off x="1234440" y="987552"/>
+            <a:ext cx="10469880" cy="566928"/>
+          </a:xfrm>
+          <a:prstGeom prst="rect">
+            <a:avLst/>
+          </a:prstGeom>
+          <a:noFill/>
+          <a:ln/>
+        </p:spPr>
+        <p:txBody>
+          <a:bodyPr wrap="square" lIns="0" tIns="0" rIns="0" bIns="0" rtlCol="0" anchor="t"/>
+          <a:lstStyle/>
+          <a:p>
+            <a:pPr indent="0" marL="0">
+              <a:buNone/>
+            </a:pPr>
+            <a:r>
+              <a:rPr lang="en-US" sz="1600" dirty="0">
+                <a:solidFill>
+                  <a:schemeClr val="tx2"/>
+                </a:solidFill>
+              </a:rPr>
+              <a:t>What the office administrator faces when a new project team asks for desks.</a:t>
+            </a:r>
+            <a:endParaRPr lang="en-US" sz="1600" dirty="0"/>
+          </a:p>
+        </p:txBody>
+      </p:sp>
+      <p:pic>
+        <p:nvPicPr>
+          <p:cNvPr id="5" name="Cartoon panel 1" descr="Panel 1, Monday 9:00: the administrator at their desk faces an inbox of three seat requests (SAP: 12 seats for a new project; DDAP: 6 more desks; ITGC: 8 joiners next week), thinking &quot;Where do I put them all?&quot;">    </p:cNvPr>
+          <p:cNvPicPr>
+            <a:picLocks noChangeAspect="1"/>
+          </p:cNvPicPr>
+          <p:nvPr/>
+        </p:nvPicPr>
+        <p:blipFill>
+          <a:blip r:embed="rId2"/>
+          <a:stretch>
+            <a:fillRect/>
+          </a:stretch>
+        </p:blipFill>
+        <p:spPr>
+          <a:xfrm>
+            <a:off x="457200" y="1691640"/>
+            <a:ext cx="2670048" cy="3115056"/>
+          </a:xfrm>
+          <a:prstGeom prst="rect">
+            <a:avLst/>
+          </a:prstGeom>
+        </p:spPr>
+      </p:pic>
+      <p:sp>
+        <p:nvSpPr>
+          <p:cNvPr id="6" name="Panel caption 1"/>
+          <p:cNvSpPr txBox="1"/>
+          <p:nvPr/>
+        </p:nvSpPr>
+        <p:spPr>
+          <a:xfrm>
+            <a:off x="457200" y="4934712"/>
+            <a:ext cx="2670048" cy="685800"/>
+          </a:xfrm>
+          <a:prstGeom prst="rect">
+            <a:avLst/>
+          </a:prstGeom>
+          <a:noFill/>
+          <a:ln/>
+        </p:spPr>
+        <p:txBody>
+          <a:bodyPr wrap="square" lIns="0" tIns="0" rIns="0" bIns="0" rtlCol="0" anchor="t"/>
+          <a:lstStyle/>
+          <a:p>
+            <a:pPr indent="0" marL="0">
+              <a:buNone/>
+            </a:pPr>
+            <a:r>
+              <a:rPr lang="en-US" sz="1400" dirty="0">
+                <a:solidFill>
+                  <a:schemeClr val="tx1"/>
+                </a:solidFill>
+              </a:rPr>
+              <a:t>Seat requests pile up from teams with new projects and joiners.</a:t>
+            </a:r>
+            <a:endParaRPr lang="en-US" sz="1400" dirty="0"/>
+          </a:p>
+        </p:txBody>
+      </p:sp>
+      <p:pic>
+        <p:nvPicPr>
+          <p:cNvPr id="7" name="Cartoon panel 2" descr="Panel 2, Head count: the administrator walks the floor with a tally clipboard past occupied, bag-claimed and empty desks, thinking &quot;Full? Half empty?&quot;">    </p:cNvPr>
+          <p:cNvPicPr>
+            <a:picLocks noChangeAspect="1"/>
+          </p:cNvPicPr>
+          <p:nvPr/>
+        </p:nvPicPr>
+        <p:blipFill>
+          <a:blip r:embed="rId3"/>
+          <a:stretch>
+            <a:fillRect/>
+          </a:stretch>
+        </p:blipFill>
+        <p:spPr>
+          <a:xfrm>
+            <a:off x="3325368" y="1691640"/>
+            <a:ext cx="2670048" cy="3115056"/>
+          </a:xfrm>
+          <a:prstGeom prst="rect">
+            <a:avLst/>
+          </a:prstGeom>
+        </p:spPr>
+      </p:pic>
+      <p:sp>
+        <p:nvSpPr>
+          <p:cNvPr id="8" name="Panel caption 2"/>
+          <p:cNvSpPr txBox="1"/>
+          <p:nvPr/>
+        </p:nvSpPr>
+        <p:spPr>
+          <a:xfrm>
+            <a:off x="3325368" y="4934712"/>
+            <a:ext cx="2670048" cy="685800"/>
+          </a:xfrm>
+          <a:prstGeom prst="rect">
+            <a:avLst/>
+          </a:prstGeom>
+          <a:noFill/>
+          <a:ln/>
+        </p:spPr>
+        <p:txBody>
+          <a:bodyPr wrap="square" lIns="0" tIns="0" rIns="0" bIns="0" rtlCol="0" anchor="t"/>
+          <a:lstStyle/>
+          <a:p>
+            <a:pPr indent="0" marL="0">
+              <a:buNone/>
+            </a:pPr>
+            <a:r>
+              <a:rPr lang="en-US" sz="1400" dirty="0">
+                <a:solidFill>
+                  <a:schemeClr val="tx1"/>
+                </a:solidFill>
+              </a:rPr>
+              <a:t>A walk-round count can’t tell a bag from a person, or a busy day from a quiet one.</a:t>
+            </a:r>
+            <a:endParaRPr lang="en-US" sz="1400" dirty="0"/>
+          </a:p>
+        </p:txBody>
+      </p:sp>
+      <p:pic>
+        <p:nvPicPr>
+          <p:cNvPr id="9" name="Cartoon panel 3" descr="Panel 3, The spreadsheet: a &quot;Seat plan.xlsx&quot; grid full of question marks with a &quot;March!&quot; sticky note; the administrator scratches their head: &quot;Is this even up to date?&quot;">    </p:cNvPr>
+          <p:cNvPicPr>
+            <a:picLocks noChangeAspect="1"/>
+          </p:cNvPicPr>
+          <p:nvPr/>
+        </p:nvPicPr>
+        <p:blipFill>
+          <a:blip r:embed="rId4"/>
+          <a:stretch>
+            <a:fillRect/>
+          </a:stretch>
+        </p:blipFill>
+        <p:spPr>
+          <a:xfrm>
+            <a:off x="6193536" y="1691640"/>
+            <a:ext cx="2670048" cy="3115056"/>
+          </a:xfrm>
+          <a:prstGeom prst="rect">
+            <a:avLst/>
+          </a:prstGeom>
+        </p:spPr>
+      </p:pic>
+      <p:sp>
+        <p:nvSpPr>
+          <p:cNvPr id="10" name="Panel caption 3"/>
+          <p:cNvSpPr txBox="1"/>
+          <p:nvPr/>
+        </p:nvSpPr>
+        <p:spPr>
+          <a:xfrm>
+            <a:off x="6193536" y="4934712"/>
+            <a:ext cx="2670048" cy="685800"/>
+          </a:xfrm>
+          <a:prstGeom prst="rect">
+            <a:avLst/>
+          </a:prstGeom>
+          <a:noFill/>
+          <a:ln/>
+        </p:spPr>
+        <p:txBody>
+          <a:bodyPr wrap="square" lIns="0" tIns="0" rIns="0" bIns="0" rtlCol="0" anchor="t"/>
+          <a:lstStyle/>
+          <a:p>
+            <a:pPr indent="0" marL="0">
+              <a:buNone/>
+            </a:pPr>
+            <a:r>
+              <a:rPr lang="en-US" sz="1400" dirty="0">
+                <a:solidFill>
+                  <a:schemeClr val="tx1"/>
+                </a:solidFill>
+              </a:rPr>
+              <a:t>The seat plan spreadsheet is months out of date.</a:t>
+            </a:r>
+            <a:endParaRPr lang="en-US" sz="1400" dirty="0"/>
+          </a:p>
+        </p:txBody>
+      </p:sp>
+      <p:pic>
+        <p:nvPicPr>
+          <p:cNvPr id="11" name="Cartoon panel 4" descr="Panel 4, Yes… no… maybe?: a DDAP team lead on the phone asks &quot;Can we move in Monday?&quot; and the administrator replies &quot;Let me get back to you…&quot;">    </p:cNvPr>
+          <p:cNvPicPr>
+            <a:picLocks noChangeAspect="1"/>
+          </p:cNvPicPr>
+          <p:nvPr/>
+        </p:nvPicPr>
+        <p:blipFill>
+          <a:blip r:embed="rId5"/>
+          <a:stretch>
+            <a:fillRect/>
+          </a:stretch>
+        </p:blipFill>
+        <p:spPr>
+          <a:xfrm>
+            <a:off x="9061704" y="1691640"/>
+            <a:ext cx="2670048" cy="3115056"/>
+          </a:xfrm>
+          <a:prstGeom prst="rect">
+            <a:avLst/>
+          </a:prstGeom>
+        </p:spPr>
+      </p:pic>
+      <p:sp>
+        <p:nvSpPr>
+          <p:cNvPr id="12" name="Panel caption 4"/>
+          <p:cNvSpPr txBox="1"/>
+          <p:nvPr/>
+        </p:nvSpPr>
+        <p:spPr>
+          <a:xfrm>
+            <a:off x="9061704" y="4934712"/>
+            <a:ext cx="2670048" cy="685800"/>
+          </a:xfrm>
+          <a:prstGeom prst="rect">
+            <a:avLst/>
+          </a:prstGeom>
+          <a:noFill/>
+          <a:ln/>
+        </p:spPr>
+        <p:txBody>
+          <a:bodyPr wrap="square" lIns="0" tIns="0" rIns="0" bIns="0" rtlCol="0" anchor="t"/>
+          <a:lstStyle/>
+          <a:p>
+            <a:pPr indent="0" marL="0">
+              <a:buNone/>
+            </a:pPr>
+            <a:r>
+              <a:rPr lang="en-US" sz="1400" dirty="0">
+                <a:solidFill>
+                  <a:schemeClr val="tx1"/>
+                </a:solidFill>
+              </a:rPr>
+              <a:t>So the team gets a “maybe” instead of an answer.</a:t>
+            </a:r>
+            <a:endParaRPr lang="en-US" sz="1400" dirty="0"/>
+          </a:p>
+        </p:txBody>
+      </p:sp>
+      <p:sp>
+        <p:nvSpPr>
+          <p:cNvPr id="13" name="Takeaway card"/>
+          <p:cNvSpPr/>
+          <p:nvPr/>
+        </p:nvSpPr>
+        <p:spPr>
+          <a:xfrm>
+            <a:off x="457200" y="5760720"/>
+            <a:ext cx="11274552" cy="603504"/>
+          </a:xfrm>
+          <a:prstGeom prst="roundRect">
+            <a:avLst>
+              <a:gd name="adj" fmla="val 15152"/>
+            </a:avLst>
+          </a:prstGeom>
+          <a:solidFill>
+            <a:schemeClr val="accent6">
+              <a:alpha val="12000"/>
+            </a:schemeClr>
+          </a:solidFill>
+          <a:ln w="12700">
+            <a:solidFill>
+              <a:schemeClr val="accent6">
+                <a:alpha val="12000"/>
+              </a:schemeClr>
+            </a:solidFill>
+            <a:prstDash val="solid"/>
+          </a:ln>
+        </p:spPr>
+      </p:sp>
+      <p:sp>
+        <p:nvSpPr>
+          <p:cNvPr id="14" name="Takeaway"/>
+          <p:cNvSpPr txBox="1"/>
+          <p:nvPr/>
+        </p:nvSpPr>
+        <p:spPr>
+          <a:xfrm>
+            <a:off x="685800" y="5760720"/>
+            <a:ext cx="10835640" cy="603504"/>
+          </a:xfrm>
+          <a:prstGeom prst="rect">
+            <a:avLst/>
+          </a:prstGeom>
+          <a:noFill/>
+          <a:ln/>
+        </p:spPr>
+        <p:txBody>
+          <a:bodyPr wrap="square" lIns="0" tIns="0" rIns="0" bIns="0" rtlCol="0" anchor="ctr"/>
+          <a:lstStyle/>
+          <a:p>
+            <a:pPr indent="0" marL="0">
+              <a:buNone/>
+            </a:pPr>
+            <a:r>
+              <a:rPr lang="en-US" sz="1600" b="1" dirty="0">
+                <a:solidFill>
+                  <a:schemeClr val="accent6"/>
+                </a:solidFill>
+              </a:rPr>
+              <a:t>The cost: </a:t>
+            </a:r>
+            <a:pPr indent="0" marL="0">
+              <a:buNone/>
+            </a:pPr>
+            <a:r>
+              <a:rPr lang="en-US" sz="1600" dirty="0">
+                <a:solidFill>
+                  <a:schemeClr val="tx1"/>
+                </a:solidFill>
+              </a:rPr>
+              <a:t>slow, gut-feel answers: teams turned away from space that is actually free, or squeezed onto a floor that is already full.</a:t>
+            </a:r>
+            <a:endParaRPr lang="en-US" sz="1600" dirty="0"/>
+          </a:p>
+        </p:txBody>
+      </p:sp>
+    </p:spTree>
+  </p:cSld>
+  <p:clrMapOvr>
+    <a:masterClrMapping/>
+  </p:clrMapOvr>
+</p:sld>
+</file>
+
+<file path=ppt/slides/slide3.xml><?xml version="1.0" encoding="utf-8"?>
+<p:sld xmlns:a="http://schemas.openxmlformats.org/drawingml/2006/main" xmlns:r="http://schemas.openxmlformats.org/officeDocument/2006/relationships" xmlns:p="http://schemas.openxmlformats.org/presentationml/2006/main">
+  <p:cSld name="Slide 3">
     <p:spTree>
       <p:nvGrpSpPr>
         <p:cNvPr id="1" name=""/>
